--- a/ゲーム科2年/00_前期/ゲーム開発Ⅲ/ゲーム物理学/座学/29_回転力学.pptx
+++ b/ゲーム科2年/00_前期/ゲーム開発Ⅲ/ゲーム物理学/座学/29_回転力学.pptx
@@ -9,6 +9,11 @@
     <p:sldId id="263" r:id="rId3"/>
     <p:sldId id="262" r:id="rId4"/>
     <p:sldId id="264" r:id="rId5"/>
+    <p:sldId id="265" r:id="rId6"/>
+    <p:sldId id="266" r:id="rId7"/>
+    <p:sldId id="267" r:id="rId8"/>
+    <p:sldId id="268" r:id="rId9"/>
+    <p:sldId id="269" r:id="rId10"/>
   </p:sldIdLst>
   <p:sldSz cx="12192000" cy="6858000"/>
   <p:notesSz cx="6858000" cy="9144000"/>
@@ -262,7 +267,7 @@
           <a:p>
             <a:fld id="{E9CC885B-4903-4D54-9A93-00025F12DED9}" type="datetimeFigureOut">
               <a:rPr kumimoji="1" lang="ja-JP" altLang="en-US" smtClean="0"/>
-              <a:t>2025/11/12</a:t>
+              <a:t>2025/11/13</a:t>
             </a:fld>
             <a:endParaRPr kumimoji="1" lang="ja-JP" altLang="en-US"/>
           </a:p>
@@ -492,7 +497,7 @@
           <a:p>
             <a:fld id="{E9CC885B-4903-4D54-9A93-00025F12DED9}" type="datetimeFigureOut">
               <a:rPr kumimoji="1" lang="ja-JP" altLang="en-US" smtClean="0"/>
-              <a:t>2025/11/12</a:t>
+              <a:t>2025/11/13</a:t>
             </a:fld>
             <a:endParaRPr kumimoji="1" lang="ja-JP" altLang="en-US"/>
           </a:p>
@@ -732,7 +737,7 @@
           <a:p>
             <a:fld id="{E9CC885B-4903-4D54-9A93-00025F12DED9}" type="datetimeFigureOut">
               <a:rPr kumimoji="1" lang="ja-JP" altLang="en-US" smtClean="0"/>
-              <a:t>2025/11/12</a:t>
+              <a:t>2025/11/13</a:t>
             </a:fld>
             <a:endParaRPr kumimoji="1" lang="ja-JP" altLang="en-US"/>
           </a:p>
@@ -962,7 +967,7 @@
           <a:p>
             <a:fld id="{E9CC885B-4903-4D54-9A93-00025F12DED9}" type="datetimeFigureOut">
               <a:rPr kumimoji="1" lang="ja-JP" altLang="en-US" smtClean="0"/>
-              <a:t>2025/11/12</a:t>
+              <a:t>2025/11/13</a:t>
             </a:fld>
             <a:endParaRPr kumimoji="1" lang="ja-JP" altLang="en-US"/>
           </a:p>
@@ -1237,7 +1242,7 @@
           <a:p>
             <a:fld id="{E9CC885B-4903-4D54-9A93-00025F12DED9}" type="datetimeFigureOut">
               <a:rPr kumimoji="1" lang="ja-JP" altLang="en-US" smtClean="0"/>
-              <a:t>2025/11/12</a:t>
+              <a:t>2025/11/13</a:t>
             </a:fld>
             <a:endParaRPr kumimoji="1" lang="ja-JP" altLang="en-US"/>
           </a:p>
@@ -1566,7 +1571,7 @@
           <a:p>
             <a:fld id="{E9CC885B-4903-4D54-9A93-00025F12DED9}" type="datetimeFigureOut">
               <a:rPr kumimoji="1" lang="ja-JP" altLang="en-US" smtClean="0"/>
-              <a:t>2025/11/12</a:t>
+              <a:t>2025/11/13</a:t>
             </a:fld>
             <a:endParaRPr kumimoji="1" lang="ja-JP" altLang="en-US"/>
           </a:p>
@@ -2042,7 +2047,7 @@
           <a:p>
             <a:fld id="{E9CC885B-4903-4D54-9A93-00025F12DED9}" type="datetimeFigureOut">
               <a:rPr kumimoji="1" lang="ja-JP" altLang="en-US" smtClean="0"/>
-              <a:t>2025/11/12</a:t>
+              <a:t>2025/11/13</a:t>
             </a:fld>
             <a:endParaRPr kumimoji="1" lang="ja-JP" altLang="en-US"/>
           </a:p>
@@ -2183,7 +2188,7 @@
           <a:p>
             <a:fld id="{E9CC885B-4903-4D54-9A93-00025F12DED9}" type="datetimeFigureOut">
               <a:rPr kumimoji="1" lang="ja-JP" altLang="en-US" smtClean="0"/>
-              <a:t>2025/11/12</a:t>
+              <a:t>2025/11/13</a:t>
             </a:fld>
             <a:endParaRPr kumimoji="1" lang="ja-JP" altLang="en-US"/>
           </a:p>
@@ -2296,7 +2301,7 @@
           <a:p>
             <a:fld id="{E9CC885B-4903-4D54-9A93-00025F12DED9}" type="datetimeFigureOut">
               <a:rPr kumimoji="1" lang="ja-JP" altLang="en-US" smtClean="0"/>
-              <a:t>2025/11/12</a:t>
+              <a:t>2025/11/13</a:t>
             </a:fld>
             <a:endParaRPr kumimoji="1" lang="ja-JP" altLang="en-US"/>
           </a:p>
@@ -2639,7 +2644,7 @@
           <a:p>
             <a:fld id="{E9CC885B-4903-4D54-9A93-00025F12DED9}" type="datetimeFigureOut">
               <a:rPr kumimoji="1" lang="ja-JP" altLang="en-US" smtClean="0"/>
-              <a:t>2025/11/12</a:t>
+              <a:t>2025/11/13</a:t>
             </a:fld>
             <a:endParaRPr kumimoji="1" lang="ja-JP" altLang="en-US"/>
           </a:p>
@@ -2927,7 +2932,7 @@
           <a:p>
             <a:fld id="{E9CC885B-4903-4D54-9A93-00025F12DED9}" type="datetimeFigureOut">
               <a:rPr kumimoji="1" lang="ja-JP" altLang="en-US" smtClean="0"/>
-              <a:t>2025/11/12</a:t>
+              <a:t>2025/11/13</a:t>
             </a:fld>
             <a:endParaRPr kumimoji="1" lang="ja-JP" altLang="en-US"/>
           </a:p>
@@ -3200,7 +3205,7 @@
           <a:p>
             <a:fld id="{E9CC885B-4903-4D54-9A93-00025F12DED9}" type="datetimeFigureOut">
               <a:rPr kumimoji="1" lang="ja-JP" altLang="en-US" smtClean="0"/>
-              <a:t>2025/11/12</a:t>
+              <a:t>2025/11/13</a:t>
             </a:fld>
             <a:endParaRPr kumimoji="1" lang="ja-JP" altLang="en-US"/>
           </a:p>
@@ -3632,7 +3637,7 @@
         <p:spPr>
           <a:xfrm>
             <a:off x="349624" y="2232212"/>
-            <a:ext cx="8946776" cy="1308847"/>
+            <a:ext cx="9260778" cy="1425388"/>
           </a:xfrm>
           <a:prstGeom prst="roundRect">
             <a:avLst/>
@@ -3814,7 +3819,7 @@
           <a:p>
             <a:r>
               <a:rPr lang="ja-JP" altLang="en-US" sz="2400" dirty="0"/>
-              <a:t>物体は回転モーメントにより回転し始め、</a:t>
+              <a:t>停止した物体は回転モーメントにより回転し始め、</a:t>
             </a:r>
             <a:endParaRPr lang="en-US" altLang="ja-JP" sz="2400" dirty="0"/>
           </a:p>
@@ -3872,7 +3877,7 @@
         <p:spPr>
           <a:xfrm>
             <a:off x="403412" y="1828800"/>
-            <a:ext cx="7135906" cy="2574318"/>
+            <a:ext cx="7135906" cy="2946400"/>
           </a:xfrm>
           <a:prstGeom prst="roundRect">
             <a:avLst/>
@@ -3964,7 +3969,7 @@
             <p:spPr>
               <a:xfrm>
                 <a:off x="567542" y="1216429"/>
-                <a:ext cx="8802410" cy="4154984"/>
+                <a:ext cx="8802410" cy="4893647"/>
               </a:xfrm>
               <a:prstGeom prst="rect">
                 <a:avLst/>
@@ -4015,6 +4020,12 @@
                         <a:latin typeface="Cambria Math" panose="02040503050406030204" pitchFamily="18" charset="0"/>
                       </a:rPr>
                       <m:t>=</m:t>
+                    </m:r>
+                    <m:r>
+                      <a:rPr lang="en-US" altLang="ja-JP" sz="2400" b="0" i="1" dirty="0" smtClean="0">
+                        <a:latin typeface="Cambria Math" panose="02040503050406030204" pitchFamily="18" charset="0"/>
+                      </a:rPr>
+                      <m:t>𝑘</m:t>
                     </m:r>
                     <m:r>
                       <a:rPr lang="en-US" altLang="ja-JP" sz="2400" b="0" i="1" dirty="0" smtClean="0">
@@ -4082,10 +4093,10 @@
                 <a14:m>
                   <m:oMath xmlns:m="http://schemas.openxmlformats.org/officeDocument/2006/math">
                     <m:r>
-                      <a:rPr lang="en-US" altLang="ja-JP" sz="2400" b="0" i="1" dirty="0" smtClean="0">
-                        <a:latin typeface="Cambria Math" panose="02040503050406030204" pitchFamily="18" charset="0"/>
-                      </a:rPr>
-                      <m:t>𝑚</m:t>
+                      <a:rPr lang="en-US" altLang="ja-JP" sz="2400" b="0" i="1" smtClean="0">
+                        <a:latin typeface="Cambria Math" panose="02040503050406030204" pitchFamily="18" charset="0"/>
+                      </a:rPr>
+                      <m:t>𝑘</m:t>
                     </m:r>
                   </m:oMath>
                 </a14:m>
@@ -4095,7 +4106,7 @@
                 </a:r>
                 <a:r>
                   <a:rPr lang="ja-JP" altLang="en-US" sz="2400" dirty="0"/>
-                  <a:t>・・・質量</a:t>
+                  <a:t>・・・慣性半径係数</a:t>
                 </a:r>
                 <a:endParaRPr lang="en-US" altLang="ja-JP" sz="2400" dirty="0"/>
               </a:p>
@@ -4106,7 +4117,7 @@
                       <a:rPr lang="en-US" altLang="ja-JP" sz="2400" b="0" i="1" dirty="0" smtClean="0">
                         <a:latin typeface="Cambria Math" panose="02040503050406030204" pitchFamily="18" charset="0"/>
                       </a:rPr>
-                      <m:t>𝑟</m:t>
+                      <m:t>𝑚</m:t>
                     </m:r>
                   </m:oMath>
                 </a14:m>
@@ -4116,6 +4127,27 @@
                 </a:r>
                 <a:r>
                   <a:rPr lang="ja-JP" altLang="en-US" sz="2400" dirty="0"/>
+                  <a:t>・・・質量</a:t>
+                </a:r>
+                <a:endParaRPr lang="en-US" altLang="ja-JP" sz="2400" dirty="0"/>
+              </a:p>
+              <a:p>
+                <a14:m>
+                  <m:oMath xmlns:m="http://schemas.openxmlformats.org/officeDocument/2006/math">
+                    <m:r>
+                      <a:rPr lang="en-US" altLang="ja-JP" sz="2400" b="0" i="1" dirty="0" smtClean="0">
+                        <a:latin typeface="Cambria Math" panose="02040503050406030204" pitchFamily="18" charset="0"/>
+                      </a:rPr>
+                      <m:t>𝑟</m:t>
+                    </m:r>
+                  </m:oMath>
+                </a14:m>
+                <a:r>
+                  <a:rPr lang="en-US" altLang="ja-JP" sz="2400" dirty="0"/>
+                  <a:t>	</a:t>
+                </a:r>
+                <a:r>
+                  <a:rPr lang="ja-JP" altLang="en-US" sz="2400" dirty="0"/>
                   <a:t>・・・半径</a:t>
                 </a:r>
                 <a:endParaRPr lang="en-US" altLang="ja-JP" sz="2400" dirty="0"/>
@@ -4134,6 +4166,13 @@
                 <a:r>
                   <a:rPr lang="ja-JP" altLang="en-US" sz="2400" dirty="0"/>
                   <a:t>・回転の半径が大きいほど回転を止める力が大きくなります。</a:t>
+                </a:r>
+                <a:endParaRPr lang="en-US" altLang="ja-JP" sz="2400" dirty="0"/>
+              </a:p>
+              <a:p>
+                <a:r>
+                  <a:rPr lang="ja-JP" altLang="en-US" sz="2400" dirty="0"/>
+                  <a:t>・慣性半径係数は回転する物体によってそれぞれ変わります。</a:t>
                 </a:r>
                 <a:endParaRPr lang="en-US" altLang="ja-JP" sz="2400" dirty="0"/>
               </a:p>
@@ -4158,7 +4197,7 @@
             <p:spPr>
               <a:xfrm>
                 <a:off x="567542" y="1216429"/>
-                <a:ext cx="8802410" cy="4154984"/>
+                <a:ext cx="8802410" cy="4893647"/>
               </a:xfrm>
               <a:prstGeom prst="rect">
                 <a:avLst/>
@@ -4166,7 +4205,7 @@
               <a:blipFill>
                 <a:blip r:embed="rId2"/>
                 <a:stretch>
-                  <a:fillRect l="-1039" t="-1175" r="-139" b="-2496"/>
+                  <a:fillRect l="-1039" t="-998" r="-139" b="-1995"/>
                 </a:stretch>
               </a:blipFill>
             </p:spPr>
@@ -4305,8 +4344,8 @@
           </a:p>
         </p:txBody>
       </p:sp>
-      <mc:AlternateContent xmlns:mc="http://schemas.openxmlformats.org/markup-compatibility/2006">
-        <mc:Choice xmlns:a14="http://schemas.microsoft.com/office/drawing/2010/main" Requires="a14">
+      <mc:AlternateContent xmlns:mc="http://schemas.openxmlformats.org/markup-compatibility/2006" xmlns:a14="http://schemas.microsoft.com/office/drawing/2010/main">
+        <mc:Choice Requires="a14">
           <p:sp>
             <p:nvSpPr>
               <p:cNvPr id="6" name="テキスト ボックス 5">
@@ -4509,7 +4548,7 @@
             </p:txBody>
           </p:sp>
         </mc:Choice>
-        <mc:Fallback>
+        <mc:Fallback xmlns="">
           <p:sp>
             <p:nvSpPr>
               <p:cNvPr id="6" name="テキスト ボックス 5">
@@ -4620,8 +4659,8 @@
           </a:p>
         </p:txBody>
       </p:sp>
-      <mc:AlternateContent xmlns:mc="http://schemas.openxmlformats.org/markup-compatibility/2006">
-        <mc:Choice xmlns:a14="http://schemas.microsoft.com/office/drawing/2010/main" Requires="a14">
+      <mc:AlternateContent xmlns:mc="http://schemas.openxmlformats.org/markup-compatibility/2006" xmlns:a14="http://schemas.microsoft.com/office/drawing/2010/main">
+        <mc:Choice Requires="a14">
           <p:sp>
             <p:nvSpPr>
               <p:cNvPr id="6" name="テキスト ボックス 5">
@@ -4767,19 +4806,7 @@
                       <a:rPr lang="en-US" altLang="ja-JP" sz="2400" b="0" i="1" dirty="0" smtClean="0">
                         <a:latin typeface="Cambria Math" panose="02040503050406030204" pitchFamily="18" charset="0"/>
                       </a:rPr>
-                      <m:t>5000</m:t>
-                    </m:r>
-                    <m:r>
-                      <a:rPr lang="en-US" altLang="ja-JP" sz="2400" b="0" i="1" dirty="0" smtClean="0">
-                        <a:latin typeface="Cambria Math" panose="02040503050406030204" pitchFamily="18" charset="0"/>
-                      </a:rPr>
-                      <m:t>=</m:t>
-                    </m:r>
-                    <m:r>
-                      <a:rPr lang="en-US" altLang="ja-JP" sz="2400" b="0" i="1" dirty="0" smtClean="0">
-                        <a:latin typeface="Cambria Math" panose="02040503050406030204" pitchFamily="18" charset="0"/>
-                      </a:rPr>
-                      <m:t>10800</m:t>
+                      <m:t>5000=10800</m:t>
                     </m:r>
                     <m:r>
                       <m:rPr>
@@ -4906,7 +4933,7 @@
             </p:txBody>
           </p:sp>
         </mc:Choice>
-        <mc:Fallback>
+        <mc:Fallback xmlns="">
           <p:sp>
             <p:nvSpPr>
               <p:cNvPr id="6" name="テキスト ボックス 5">
@@ -5240,6 +5267,3340 @@
     <p:extLst>
       <p:ext uri="{BB962C8B-B14F-4D97-AF65-F5344CB8AC3E}">
         <p14:creationId xmlns:p14="http://schemas.microsoft.com/office/powerpoint/2010/main" val="3974591367"/>
+      </p:ext>
+    </p:extLst>
+  </p:cSld>
+  <p:clrMapOvr>
+    <a:masterClrMapping/>
+  </p:clrMapOvr>
+</p:sld>
+</file>
+
+<file path=ppt/slides/slide5.xml><?xml version="1.0" encoding="utf-8"?>
+<p:sld xmlns:a="http://schemas.openxmlformats.org/drawingml/2006/main" xmlns:r="http://schemas.openxmlformats.org/officeDocument/2006/relationships" xmlns:p="http://schemas.openxmlformats.org/presentationml/2006/main">
+  <p:cSld>
+    <p:spTree>
+      <p:nvGrpSpPr>
+        <p:cNvPr id="1" name=""/>
+        <p:cNvGrpSpPr/>
+        <p:nvPr/>
+      </p:nvGrpSpPr>
+      <p:grpSpPr>
+        <a:xfrm>
+          <a:off x="0" y="0"/>
+          <a:ext cx="0" cy="0"/>
+          <a:chOff x="0" y="0"/>
+          <a:chExt cx="0" cy="0"/>
+        </a:xfrm>
+      </p:grpSpPr>
+      <p:sp>
+        <p:nvSpPr>
+          <p:cNvPr id="3" name="四角形: 角を丸くする 2">
+            <a:extLst>
+              <a:ext uri="{FF2B5EF4-FFF2-40B4-BE49-F238E27FC236}">
+                <a16:creationId xmlns:a16="http://schemas.microsoft.com/office/drawing/2014/main" id="{B9A5B19D-F6B9-40C9-9D8C-CB81B143CBA0}"/>
+              </a:ext>
+            </a:extLst>
+          </p:cNvPr>
+          <p:cNvSpPr/>
+          <p:nvPr/>
+        </p:nvSpPr>
+        <p:spPr>
+          <a:xfrm>
+            <a:off x="287867" y="2184400"/>
+            <a:ext cx="7052733" cy="2599267"/>
+          </a:xfrm>
+          <a:prstGeom prst="roundRect">
+            <a:avLst/>
+          </a:prstGeom>
+          <a:solidFill>
+            <a:schemeClr val="bg1">
+              <a:lumMod val="85000"/>
+            </a:schemeClr>
+          </a:solidFill>
+          <a:ln>
+            <a:noFill/>
+          </a:ln>
+        </p:spPr>
+        <p:style>
+          <a:lnRef idx="2">
+            <a:schemeClr val="accent1">
+              <a:shade val="50000"/>
+            </a:schemeClr>
+          </a:lnRef>
+          <a:fillRef idx="1">
+            <a:schemeClr val="accent1"/>
+          </a:fillRef>
+          <a:effectRef idx="0">
+            <a:schemeClr val="accent1"/>
+          </a:effectRef>
+          <a:fontRef idx="minor">
+            <a:schemeClr val="lt1"/>
+          </a:fontRef>
+        </p:style>
+        <p:txBody>
+          <a:bodyPr rtlCol="0" anchor="ctr"/>
+          <a:lstStyle/>
+          <a:p>
+            <a:pPr algn="ctr"/>
+            <a:endParaRPr kumimoji="1" lang="ja-JP" altLang="en-US"/>
+          </a:p>
+        </p:txBody>
+      </p:sp>
+      <p:sp>
+        <p:nvSpPr>
+          <p:cNvPr id="4" name="テキスト ボックス 3">
+            <a:extLst>
+              <a:ext uri="{FF2B5EF4-FFF2-40B4-BE49-F238E27FC236}">
+                <a16:creationId xmlns:a16="http://schemas.microsoft.com/office/drawing/2014/main" id="{5A13BF46-B8C5-48AA-8308-C9ECFF431A18}"/>
+              </a:ext>
+            </a:extLst>
+          </p:cNvPr>
+          <p:cNvSpPr txBox="1"/>
+          <p:nvPr/>
+        </p:nvSpPr>
+        <p:spPr>
+          <a:xfrm>
+            <a:off x="567542" y="491954"/>
+            <a:ext cx="1826141" cy="584775"/>
+          </a:xfrm>
+          <a:prstGeom prst="rect">
+            <a:avLst/>
+          </a:prstGeom>
+          <a:noFill/>
+        </p:spPr>
+        <p:txBody>
+          <a:bodyPr wrap="none" rtlCol="0">
+            <a:spAutoFit/>
+          </a:bodyPr>
+          <a:lstStyle/>
+          <a:p>
+            <a:r>
+              <a:rPr lang="ja-JP" altLang="en-US" sz="3200" b="1" u="sng" dirty="0"/>
+              <a:t>回転力学</a:t>
+            </a:r>
+            <a:endParaRPr kumimoji="1" lang="en-US" altLang="ja-JP" sz="3200" b="1" u="sng" dirty="0"/>
+          </a:p>
+        </p:txBody>
+      </p:sp>
+      <mc:AlternateContent xmlns:mc="http://schemas.openxmlformats.org/markup-compatibility/2006" xmlns:a14="http://schemas.microsoft.com/office/drawing/2010/main">
+        <mc:Choice Requires="a14">
+          <p:sp>
+            <p:nvSpPr>
+              <p:cNvPr id="6" name="テキスト ボックス 5">
+                <a:extLst>
+                  <a:ext uri="{FF2B5EF4-FFF2-40B4-BE49-F238E27FC236}">
+                    <a16:creationId xmlns:a16="http://schemas.microsoft.com/office/drawing/2014/main" id="{55830AD6-028B-4C4E-80BF-B70DFC1C3A46}"/>
+                  </a:ext>
+                </a:extLst>
+              </p:cNvPr>
+              <p:cNvSpPr txBox="1"/>
+              <p:nvPr/>
+            </p:nvSpPr>
+            <p:spPr>
+              <a:xfrm>
+                <a:off x="567542" y="1216429"/>
+                <a:ext cx="8494633" cy="4676537"/>
+              </a:xfrm>
+              <a:prstGeom prst="rect">
+                <a:avLst/>
+              </a:prstGeom>
+              <a:noFill/>
+            </p:spPr>
+            <p:txBody>
+              <a:bodyPr wrap="none" rtlCol="0">
+                <a:spAutoFit/>
+              </a:bodyPr>
+              <a:lstStyle/>
+              <a:p>
+                <a:r>
+                  <a:rPr lang="ja-JP" altLang="en-US" sz="2400" dirty="0"/>
+                  <a:t>回転モーメントは回転させる力です。</a:t>
+                </a:r>
+                <a:endParaRPr lang="en-US" altLang="ja-JP" sz="2400" dirty="0"/>
+              </a:p>
+              <a:p>
+                <a:r>
+                  <a:rPr lang="ja-JP" altLang="en-US" sz="2400" dirty="0"/>
+                  <a:t>力が発生するところには必ず運動エネルギーがあります。</a:t>
+                </a:r>
+                <a:endParaRPr lang="en-US" altLang="ja-JP" sz="2400" dirty="0"/>
+              </a:p>
+              <a:p>
+                <a:endParaRPr lang="en-US" altLang="ja-JP" sz="2400" dirty="0"/>
+              </a:p>
+              <a:p>
+                <a:r>
+                  <a:rPr lang="ja-JP" altLang="en-US" sz="2400" b="1" dirty="0">
+                    <a:solidFill>
+                      <a:srgbClr val="FF0000"/>
+                    </a:solidFill>
+                  </a:rPr>
+                  <a:t>■回転運動における運動エネルギー</a:t>
+                </a:r>
+                <a:endParaRPr lang="en-US" altLang="ja-JP" sz="2400" b="1" dirty="0">
+                  <a:solidFill>
+                    <a:srgbClr val="FF0000"/>
+                  </a:solidFill>
+                </a:endParaRPr>
+              </a:p>
+              <a:p>
+                <a14:m>
+                  <m:oMath xmlns:m="http://schemas.openxmlformats.org/officeDocument/2006/math">
+                    <m:r>
+                      <a:rPr lang="en-US" altLang="ja-JP" sz="2400" b="0" i="1" smtClean="0">
+                        <a:latin typeface="Cambria Math" panose="02040503050406030204" pitchFamily="18" charset="0"/>
+                      </a:rPr>
+                      <m:t>𝐾𝐸</m:t>
+                    </m:r>
+                    <m:r>
+                      <a:rPr lang="en-US" altLang="ja-JP" sz="2400" b="0" i="1" baseline="-25000" smtClean="0">
+                        <a:latin typeface="Cambria Math" panose="02040503050406030204" pitchFamily="18" charset="0"/>
+                      </a:rPr>
+                      <m:t>𝑅</m:t>
+                    </m:r>
+                    <m:r>
+                      <a:rPr lang="en-US" altLang="ja-JP" sz="2400" b="0" i="1" smtClean="0">
+                        <a:latin typeface="Cambria Math" panose="02040503050406030204" pitchFamily="18" charset="0"/>
+                      </a:rPr>
+                      <m:t>=</m:t>
+                    </m:r>
+                    <m:f>
+                      <m:fPr>
+                        <m:ctrlPr>
+                          <a:rPr lang="en-US" altLang="ja-JP" sz="2400" b="0" i="1" smtClean="0">
+                            <a:latin typeface="Cambria Math" panose="02040503050406030204" pitchFamily="18" charset="0"/>
+                          </a:rPr>
+                        </m:ctrlPr>
+                      </m:fPr>
+                      <m:num>
+                        <m:r>
+                          <a:rPr lang="en-US" altLang="ja-JP" sz="2400" b="0" i="1" smtClean="0">
+                            <a:latin typeface="Cambria Math" panose="02040503050406030204" pitchFamily="18" charset="0"/>
+                          </a:rPr>
+                          <m:t>1</m:t>
+                        </m:r>
+                      </m:num>
+                      <m:den>
+                        <m:r>
+                          <a:rPr lang="en-US" altLang="ja-JP" sz="2400" b="0" i="1" smtClean="0">
+                            <a:latin typeface="Cambria Math" panose="02040503050406030204" pitchFamily="18" charset="0"/>
+                          </a:rPr>
+                          <m:t>2</m:t>
+                        </m:r>
+                      </m:den>
+                    </m:f>
+                    <m:r>
+                      <a:rPr lang="en-US" altLang="ja-JP" sz="2400" b="0" i="1" smtClean="0">
+                        <a:latin typeface="Cambria Math" panose="02040503050406030204" pitchFamily="18" charset="0"/>
+                      </a:rPr>
+                      <m:t>𝐼</m:t>
+                    </m:r>
+                    <m:r>
+                      <m:rPr>
+                        <m:sty m:val="p"/>
+                      </m:rPr>
+                      <a:rPr lang="en-US" altLang="ja-JP" sz="2400" i="1">
+                        <a:latin typeface="Cambria Math" panose="02040503050406030204" pitchFamily="18" charset="0"/>
+                      </a:rPr>
+                      <m:t>ω</m:t>
+                    </m:r>
+                    <m:r>
+                      <a:rPr lang="en-US" altLang="ja-JP" sz="2400" b="0" i="1" baseline="30000" smtClean="0">
+                        <a:latin typeface="Cambria Math" panose="02040503050406030204" pitchFamily="18" charset="0"/>
+                      </a:rPr>
+                      <m:t>2</m:t>
+                    </m:r>
+                  </m:oMath>
+                </a14:m>
+                <a:r>
+                  <a:rPr lang="en-US" altLang="ja-JP" sz="2400" dirty="0"/>
+                  <a:t> </a:t>
+                </a:r>
+              </a:p>
+              <a:p>
+                <a:endParaRPr lang="en-US" altLang="ja-JP" sz="2400" dirty="0"/>
+              </a:p>
+              <a:p>
+                <a14:m>
+                  <m:oMath xmlns:m="http://schemas.openxmlformats.org/officeDocument/2006/math">
+                    <m:r>
+                      <a:rPr lang="en-US" altLang="ja-JP" sz="2400" b="0" i="1" smtClean="0">
+                        <a:latin typeface="Cambria Math" panose="02040503050406030204" pitchFamily="18" charset="0"/>
+                      </a:rPr>
+                      <m:t>𝐾𝐸</m:t>
+                    </m:r>
+                    <m:r>
+                      <a:rPr lang="en-US" altLang="ja-JP" sz="2400" b="0" i="1" baseline="-25000" smtClean="0">
+                        <a:latin typeface="Cambria Math" panose="02040503050406030204" pitchFamily="18" charset="0"/>
+                      </a:rPr>
+                      <m:t>𝑅</m:t>
+                    </m:r>
+                  </m:oMath>
+                </a14:m>
+                <a:r>
+                  <a:rPr lang="en-US" altLang="ja-JP" sz="2400" dirty="0"/>
+                  <a:t>	</a:t>
+                </a:r>
+                <a:r>
+                  <a:rPr lang="ja-JP" altLang="en-US" sz="2400" dirty="0"/>
+                  <a:t>・・・回転運動における運動エネルギー</a:t>
+                </a:r>
+                <a:endParaRPr lang="en-US" altLang="ja-JP" sz="2400" dirty="0"/>
+              </a:p>
+              <a:p>
+                <a14:m>
+                  <m:oMath xmlns:m="http://schemas.openxmlformats.org/officeDocument/2006/math">
+                    <m:r>
+                      <a:rPr lang="en-US" altLang="ja-JP" sz="2400" b="0" i="1" smtClean="0">
+                        <a:latin typeface="Cambria Math" panose="02040503050406030204" pitchFamily="18" charset="0"/>
+                      </a:rPr>
+                      <m:t>𝐼</m:t>
+                    </m:r>
+                  </m:oMath>
+                </a14:m>
+                <a:r>
+                  <a:rPr lang="en-US" altLang="ja-JP" sz="2400" dirty="0"/>
+                  <a:t>	</a:t>
+                </a:r>
+                <a:r>
+                  <a:rPr lang="ja-JP" altLang="en-US" sz="2400" dirty="0"/>
+                  <a:t>・・・慣性モーメント</a:t>
+                </a:r>
+                <a:endParaRPr lang="en-US" altLang="ja-JP" sz="2400" dirty="0"/>
+              </a:p>
+              <a:p>
+                <a14:m>
+                  <m:oMath xmlns:m="http://schemas.openxmlformats.org/officeDocument/2006/math">
+                    <m:r>
+                      <m:rPr>
+                        <m:sty m:val="p"/>
+                      </m:rPr>
+                      <a:rPr lang="el-GR" altLang="ja-JP" sz="2400" i="1" smtClean="0">
+                        <a:latin typeface="Cambria Math" panose="02040503050406030204" pitchFamily="18" charset="0"/>
+                      </a:rPr>
+                      <m:t>Ω</m:t>
+                    </m:r>
+                  </m:oMath>
+                </a14:m>
+                <a:r>
+                  <a:rPr lang="en-US" altLang="ja-JP" sz="2400" dirty="0"/>
+                  <a:t>	</a:t>
+                </a:r>
+                <a:r>
+                  <a:rPr lang="ja-JP" altLang="en-US" sz="2400" dirty="0"/>
+                  <a:t>・・・角速度</a:t>
+                </a:r>
+                <a:endParaRPr lang="en-US" altLang="ja-JP" sz="2400" dirty="0"/>
+              </a:p>
+              <a:p>
+                <a:endParaRPr lang="en-US" altLang="ja-JP" sz="2400" dirty="0"/>
+              </a:p>
+              <a:p>
+                <a:r>
+                  <a:rPr lang="ja-JP" altLang="en-US" sz="2400" dirty="0"/>
+                  <a:t>以前学習した運動エネルギーの定義も復習しましょう。</a:t>
+                </a:r>
+                <a:endParaRPr lang="en-US" altLang="ja-JP" sz="2400" dirty="0"/>
+              </a:p>
+              <a:p>
+                <a:r>
+                  <a:rPr lang="ja-JP" altLang="en-US" sz="2400" dirty="0"/>
+                  <a:t>慣性モーメントは実質的に質量だということが分かります。</a:t>
+                </a:r>
+                <a:endParaRPr lang="en-US" altLang="ja-JP" sz="2400" dirty="0"/>
+              </a:p>
+            </p:txBody>
+          </p:sp>
+        </mc:Choice>
+        <mc:Fallback xmlns="">
+          <p:sp>
+            <p:nvSpPr>
+              <p:cNvPr id="6" name="テキスト ボックス 5">
+                <a:extLst>
+                  <a:ext uri="{FF2B5EF4-FFF2-40B4-BE49-F238E27FC236}">
+                    <a16:creationId xmlns:a16="http://schemas.microsoft.com/office/drawing/2014/main" id="{55830AD6-028B-4C4E-80BF-B70DFC1C3A46}"/>
+                  </a:ext>
+                </a:extLst>
+              </p:cNvPr>
+              <p:cNvSpPr txBox="1">
+                <a:spLocks noRot="1" noChangeAspect="1" noMove="1" noResize="1" noEditPoints="1" noAdjustHandles="1" noChangeArrowheads="1" noChangeShapeType="1" noTextEdit="1"/>
+              </p:cNvSpPr>
+              <p:nvPr/>
+            </p:nvSpPr>
+            <p:spPr>
+              <a:xfrm>
+                <a:off x="567542" y="1216429"/>
+                <a:ext cx="8494633" cy="4676537"/>
+              </a:xfrm>
+              <a:prstGeom prst="rect">
+                <a:avLst/>
+              </a:prstGeom>
+              <a:blipFill>
+                <a:blip r:embed="rId2"/>
+                <a:stretch>
+                  <a:fillRect l="-1076" t="-1043" r="-143" b="-2086"/>
+                </a:stretch>
+              </a:blipFill>
+            </p:spPr>
+            <p:txBody>
+              <a:bodyPr/>
+              <a:lstStyle/>
+              <a:p>
+                <a:r>
+                  <a:rPr lang="ja-JP" altLang="en-US">
+                    <a:noFill/>
+                  </a:rPr>
+                  <a:t> </a:t>
+                </a:r>
+              </a:p>
+            </p:txBody>
+          </p:sp>
+        </mc:Fallback>
+      </mc:AlternateContent>
+    </p:spTree>
+    <p:extLst>
+      <p:ext uri="{BB962C8B-B14F-4D97-AF65-F5344CB8AC3E}">
+        <p14:creationId xmlns:p14="http://schemas.microsoft.com/office/powerpoint/2010/main" val="1365050411"/>
+      </p:ext>
+    </p:extLst>
+  </p:cSld>
+  <p:clrMapOvr>
+    <a:masterClrMapping/>
+  </p:clrMapOvr>
+</p:sld>
+</file>
+
+<file path=ppt/slides/slide6.xml><?xml version="1.0" encoding="utf-8"?>
+<p:sld xmlns:a="http://schemas.openxmlformats.org/drawingml/2006/main" xmlns:r="http://schemas.openxmlformats.org/officeDocument/2006/relationships" xmlns:p="http://schemas.openxmlformats.org/presentationml/2006/main">
+  <p:cSld>
+    <p:spTree>
+      <p:nvGrpSpPr>
+        <p:cNvPr id="1" name=""/>
+        <p:cNvGrpSpPr/>
+        <p:nvPr/>
+      </p:nvGrpSpPr>
+      <p:grpSpPr>
+        <a:xfrm>
+          <a:off x="0" y="0"/>
+          <a:ext cx="0" cy="0"/>
+          <a:chOff x="0" y="0"/>
+          <a:chExt cx="0" cy="0"/>
+        </a:xfrm>
+      </p:grpSpPr>
+      <p:sp>
+        <p:nvSpPr>
+          <p:cNvPr id="5" name="四角形: 角を丸くする 4">
+            <a:extLst>
+              <a:ext uri="{FF2B5EF4-FFF2-40B4-BE49-F238E27FC236}">
+                <a16:creationId xmlns:a16="http://schemas.microsoft.com/office/drawing/2014/main" id="{7A594F16-8225-4654-A2E1-EEAC0CA672E0}"/>
+              </a:ext>
+            </a:extLst>
+          </p:cNvPr>
+          <p:cNvSpPr/>
+          <p:nvPr/>
+        </p:nvSpPr>
+        <p:spPr>
+          <a:xfrm>
+            <a:off x="287867" y="2184400"/>
+            <a:ext cx="7052733" cy="2599267"/>
+          </a:xfrm>
+          <a:prstGeom prst="roundRect">
+            <a:avLst/>
+          </a:prstGeom>
+          <a:solidFill>
+            <a:schemeClr val="bg1">
+              <a:lumMod val="85000"/>
+            </a:schemeClr>
+          </a:solidFill>
+          <a:ln>
+            <a:noFill/>
+          </a:ln>
+        </p:spPr>
+        <p:style>
+          <a:lnRef idx="2">
+            <a:schemeClr val="accent1">
+              <a:shade val="50000"/>
+            </a:schemeClr>
+          </a:lnRef>
+          <a:fillRef idx="1">
+            <a:schemeClr val="accent1"/>
+          </a:fillRef>
+          <a:effectRef idx="0">
+            <a:schemeClr val="accent1"/>
+          </a:effectRef>
+          <a:fontRef idx="minor">
+            <a:schemeClr val="lt1"/>
+          </a:fontRef>
+        </p:style>
+        <p:txBody>
+          <a:bodyPr rtlCol="0" anchor="ctr"/>
+          <a:lstStyle/>
+          <a:p>
+            <a:pPr algn="ctr"/>
+            <a:endParaRPr kumimoji="1" lang="ja-JP" altLang="en-US"/>
+          </a:p>
+        </p:txBody>
+      </p:sp>
+      <p:sp>
+        <p:nvSpPr>
+          <p:cNvPr id="4" name="テキスト ボックス 3">
+            <a:extLst>
+              <a:ext uri="{FF2B5EF4-FFF2-40B4-BE49-F238E27FC236}">
+                <a16:creationId xmlns:a16="http://schemas.microsoft.com/office/drawing/2014/main" id="{5A13BF46-B8C5-48AA-8308-C9ECFF431A18}"/>
+              </a:ext>
+            </a:extLst>
+          </p:cNvPr>
+          <p:cNvSpPr txBox="1"/>
+          <p:nvPr/>
+        </p:nvSpPr>
+        <p:spPr>
+          <a:xfrm>
+            <a:off x="567542" y="491954"/>
+            <a:ext cx="1826141" cy="584775"/>
+          </a:xfrm>
+          <a:prstGeom prst="rect">
+            <a:avLst/>
+          </a:prstGeom>
+          <a:noFill/>
+        </p:spPr>
+        <p:txBody>
+          <a:bodyPr wrap="none" rtlCol="0">
+            <a:spAutoFit/>
+          </a:bodyPr>
+          <a:lstStyle/>
+          <a:p>
+            <a:r>
+              <a:rPr lang="ja-JP" altLang="en-US" sz="3200" b="1" u="sng" dirty="0"/>
+              <a:t>回転力学</a:t>
+            </a:r>
+            <a:endParaRPr kumimoji="1" lang="en-US" altLang="ja-JP" sz="3200" b="1" u="sng" dirty="0"/>
+          </a:p>
+        </p:txBody>
+      </p:sp>
+      <mc:AlternateContent xmlns:mc="http://schemas.openxmlformats.org/markup-compatibility/2006" xmlns:a14="http://schemas.microsoft.com/office/drawing/2010/main">
+        <mc:Choice Requires="a14">
+          <p:sp>
+            <p:nvSpPr>
+              <p:cNvPr id="6" name="テキスト ボックス 5">
+                <a:extLst>
+                  <a:ext uri="{FF2B5EF4-FFF2-40B4-BE49-F238E27FC236}">
+                    <a16:creationId xmlns:a16="http://schemas.microsoft.com/office/drawing/2014/main" id="{55830AD6-028B-4C4E-80BF-B70DFC1C3A46}"/>
+                  </a:ext>
+                </a:extLst>
+              </p:cNvPr>
+              <p:cNvSpPr txBox="1"/>
+              <p:nvPr/>
+            </p:nvSpPr>
+            <p:spPr>
+              <a:xfrm>
+                <a:off x="567542" y="1216429"/>
+                <a:ext cx="11264622" cy="3445943"/>
+              </a:xfrm>
+              <a:prstGeom prst="rect">
+                <a:avLst/>
+              </a:prstGeom>
+              <a:noFill/>
+            </p:spPr>
+            <p:txBody>
+              <a:bodyPr wrap="none" rtlCol="0">
+                <a:spAutoFit/>
+              </a:bodyPr>
+              <a:lstStyle/>
+              <a:p>
+                <a:r>
+                  <a:rPr lang="ja-JP" altLang="en-US" sz="2400" dirty="0"/>
+                  <a:t>また、エネルギーには保存の法則があります。</a:t>
+                </a:r>
+                <a:endParaRPr lang="en-US" altLang="ja-JP" sz="2400" dirty="0"/>
+              </a:p>
+              <a:p>
+                <a:r>
+                  <a:rPr lang="ja-JP" altLang="en-US" sz="2400" dirty="0"/>
+                  <a:t>これは、これまでのエネルギー保存則に回転エネルギーが加わっても同じです。</a:t>
+                </a:r>
+                <a:endParaRPr lang="en-US" altLang="ja-JP" sz="2400" dirty="0"/>
+              </a:p>
+              <a:p>
+                <a:endParaRPr lang="en-US" altLang="ja-JP" sz="2400" dirty="0"/>
+              </a:p>
+              <a:p>
+                <a:r>
+                  <a:rPr lang="ja-JP" altLang="en-US" sz="2400" b="1" dirty="0">
+                    <a:solidFill>
+                      <a:srgbClr val="FF0000"/>
+                    </a:solidFill>
+                  </a:rPr>
+                  <a:t>■回転を含む力学的エネルギー保存の法則</a:t>
+                </a:r>
+                <a:endParaRPr lang="en-US" altLang="ja-JP" sz="2400" b="1" dirty="0">
+                  <a:solidFill>
+                    <a:srgbClr val="FF0000"/>
+                  </a:solidFill>
+                </a:endParaRPr>
+              </a:p>
+              <a:p>
+                <a14:m>
+                  <m:oMath xmlns:m="http://schemas.openxmlformats.org/officeDocument/2006/math">
+                    <m:sSub>
+                      <m:sSubPr>
+                        <m:ctrlPr>
+                          <a:rPr lang="en-US" altLang="ja-JP" sz="2400" i="1" smtClean="0">
+                            <a:latin typeface="Cambria Math" panose="02040503050406030204" pitchFamily="18" charset="0"/>
+                          </a:rPr>
+                        </m:ctrlPr>
+                      </m:sSubPr>
+                      <m:e>
+                        <m:sSub>
+                          <m:sSubPr>
+                            <m:ctrlPr>
+                              <a:rPr lang="en-US" altLang="ja-JP" sz="2400" i="1">
+                                <a:latin typeface="Cambria Math" panose="02040503050406030204" pitchFamily="18" charset="0"/>
+                              </a:rPr>
+                            </m:ctrlPr>
+                          </m:sSubPr>
+                          <m:e>
+                            <m:r>
+                              <a:rPr lang="en-US" altLang="ja-JP" sz="2400" i="1">
+                                <a:latin typeface="Cambria Math" panose="02040503050406030204" pitchFamily="18" charset="0"/>
+                              </a:rPr>
+                              <m:t>𝑃𝐸</m:t>
+                            </m:r>
+                          </m:e>
+                          <m:sub>
+                            <m:r>
+                              <a:rPr lang="en-US" altLang="ja-JP" sz="2400" i="1">
+                                <a:latin typeface="Cambria Math" panose="02040503050406030204" pitchFamily="18" charset="0"/>
+                              </a:rPr>
+                              <m:t>𝑖</m:t>
+                            </m:r>
+                          </m:sub>
+                        </m:sSub>
+                        <m:r>
+                          <a:rPr lang="en-US" altLang="ja-JP" sz="2400" b="0" i="1" smtClean="0">
+                            <a:latin typeface="Cambria Math" panose="02040503050406030204" pitchFamily="18" charset="0"/>
+                          </a:rPr>
+                          <m:t>+</m:t>
+                        </m:r>
+                        <m:r>
+                          <a:rPr lang="en-US" altLang="ja-JP" sz="2400" b="0" i="1" smtClean="0">
+                            <a:latin typeface="Cambria Math" panose="02040503050406030204" pitchFamily="18" charset="0"/>
+                          </a:rPr>
+                          <m:t>𝐾𝐸</m:t>
+                        </m:r>
+                      </m:e>
+                      <m:sub>
+                        <m:r>
+                          <a:rPr lang="en-US" altLang="ja-JP" sz="2400" b="0" i="1" smtClean="0">
+                            <a:latin typeface="Cambria Math" panose="02040503050406030204" pitchFamily="18" charset="0"/>
+                          </a:rPr>
+                          <m:t>𝑇𝑖</m:t>
+                        </m:r>
+                      </m:sub>
+                    </m:sSub>
+                    <m:r>
+                      <a:rPr lang="en-US" altLang="ja-JP" sz="2400" b="0" i="1" smtClean="0">
+                        <a:latin typeface="Cambria Math" panose="02040503050406030204" pitchFamily="18" charset="0"/>
+                      </a:rPr>
+                      <m:t>+</m:t>
+                    </m:r>
+                    <m:sSub>
+                      <m:sSubPr>
+                        <m:ctrlPr>
+                          <a:rPr lang="en-US" altLang="ja-JP" sz="2400" i="1">
+                            <a:latin typeface="Cambria Math" panose="02040503050406030204" pitchFamily="18" charset="0"/>
+                          </a:rPr>
+                        </m:ctrlPr>
+                      </m:sSubPr>
+                      <m:e>
+                        <m:r>
+                          <a:rPr lang="en-US" altLang="ja-JP" sz="2400" i="1">
+                            <a:latin typeface="Cambria Math" panose="02040503050406030204" pitchFamily="18" charset="0"/>
+                          </a:rPr>
+                          <m:t>𝐾𝐸</m:t>
+                        </m:r>
+                      </m:e>
+                      <m:sub>
+                        <m:r>
+                          <a:rPr lang="en-US" altLang="ja-JP" sz="2400" b="0" i="1" smtClean="0">
+                            <a:latin typeface="Cambria Math" panose="02040503050406030204" pitchFamily="18" charset="0"/>
+                          </a:rPr>
+                          <m:t>𝑅</m:t>
+                        </m:r>
+                        <m:r>
+                          <a:rPr lang="en-US" altLang="ja-JP" sz="2400" i="1">
+                            <a:latin typeface="Cambria Math" panose="02040503050406030204" pitchFamily="18" charset="0"/>
+                          </a:rPr>
+                          <m:t>𝑖</m:t>
+                        </m:r>
+                      </m:sub>
+                    </m:sSub>
+                    <m:r>
+                      <a:rPr lang="en-US" altLang="ja-JP" sz="2400" b="0" i="1" smtClean="0">
+                        <a:latin typeface="Cambria Math" panose="02040503050406030204" pitchFamily="18" charset="0"/>
+                      </a:rPr>
+                      <m:t>=</m:t>
+                    </m:r>
+                    <m:sSub>
+                      <m:sSubPr>
+                        <m:ctrlPr>
+                          <a:rPr lang="en-US" altLang="ja-JP" sz="2400" i="1" smtClean="0">
+                            <a:latin typeface="Cambria Math" panose="02040503050406030204" pitchFamily="18" charset="0"/>
+                          </a:rPr>
+                        </m:ctrlPr>
+                      </m:sSubPr>
+                      <m:e>
+                        <m:sSub>
+                          <m:sSubPr>
+                            <m:ctrlPr>
+                              <a:rPr lang="en-US" altLang="ja-JP" sz="2400" i="1">
+                                <a:latin typeface="Cambria Math" panose="02040503050406030204" pitchFamily="18" charset="0"/>
+                              </a:rPr>
+                            </m:ctrlPr>
+                          </m:sSubPr>
+                          <m:e>
+                            <m:r>
+                              <a:rPr lang="en-US" altLang="ja-JP" sz="2400" i="1">
+                                <a:latin typeface="Cambria Math" panose="02040503050406030204" pitchFamily="18" charset="0"/>
+                              </a:rPr>
+                              <m:t>𝑃𝐸</m:t>
+                            </m:r>
+                          </m:e>
+                          <m:sub>
+                            <m:r>
+                              <a:rPr lang="en-US" altLang="ja-JP" sz="2400" i="1">
+                                <a:latin typeface="Cambria Math" panose="02040503050406030204" pitchFamily="18" charset="0"/>
+                              </a:rPr>
+                              <m:t>𝑓</m:t>
+                            </m:r>
+                          </m:sub>
+                        </m:sSub>
+                        <m:r>
+                          <a:rPr lang="en-US" altLang="ja-JP" sz="2400" b="0" i="1" smtClean="0">
+                            <a:latin typeface="Cambria Math" panose="02040503050406030204" pitchFamily="18" charset="0"/>
+                          </a:rPr>
+                          <m:t>+</m:t>
+                        </m:r>
+                        <m:r>
+                          <a:rPr lang="en-US" altLang="ja-JP" sz="2400" i="1">
+                            <a:latin typeface="Cambria Math" panose="02040503050406030204" pitchFamily="18" charset="0"/>
+                          </a:rPr>
+                          <m:t>𝐾𝐸</m:t>
+                        </m:r>
+                      </m:e>
+                      <m:sub>
+                        <m:r>
+                          <a:rPr lang="en-US" altLang="ja-JP" sz="2400" b="0" i="1" smtClean="0">
+                            <a:latin typeface="Cambria Math" panose="02040503050406030204" pitchFamily="18" charset="0"/>
+                          </a:rPr>
+                          <m:t>𝑇𝑓</m:t>
+                        </m:r>
+                      </m:sub>
+                    </m:sSub>
+                    <m:r>
+                      <a:rPr lang="en-US" altLang="ja-JP" sz="2400" b="0" i="1" smtClean="0">
+                        <a:latin typeface="Cambria Math" panose="02040503050406030204" pitchFamily="18" charset="0"/>
+                      </a:rPr>
+                      <m:t>+</m:t>
+                    </m:r>
+                    <m:sSub>
+                      <m:sSubPr>
+                        <m:ctrlPr>
+                          <a:rPr lang="en-US" altLang="ja-JP" sz="2400" i="1">
+                            <a:latin typeface="Cambria Math" panose="02040503050406030204" pitchFamily="18" charset="0"/>
+                          </a:rPr>
+                        </m:ctrlPr>
+                      </m:sSubPr>
+                      <m:e>
+                        <m:r>
+                          <a:rPr lang="en-US" altLang="ja-JP" sz="2400" i="1">
+                            <a:latin typeface="Cambria Math" panose="02040503050406030204" pitchFamily="18" charset="0"/>
+                          </a:rPr>
+                          <m:t>𝐾𝐸</m:t>
+                        </m:r>
+                      </m:e>
+                      <m:sub>
+                        <m:r>
+                          <a:rPr lang="en-US" altLang="ja-JP" sz="2400" b="0" i="1" smtClean="0">
+                            <a:latin typeface="Cambria Math" panose="02040503050406030204" pitchFamily="18" charset="0"/>
+                          </a:rPr>
+                          <m:t>𝑅</m:t>
+                        </m:r>
+                        <m:r>
+                          <a:rPr lang="en-US" altLang="ja-JP" sz="2400" i="1">
+                            <a:latin typeface="Cambria Math" panose="02040503050406030204" pitchFamily="18" charset="0"/>
+                          </a:rPr>
+                          <m:t>𝑓</m:t>
+                        </m:r>
+                      </m:sub>
+                    </m:sSub>
+                  </m:oMath>
+                </a14:m>
+                <a:r>
+                  <a:rPr lang="en-US" altLang="ja-JP" sz="2400" dirty="0"/>
+                  <a:t> </a:t>
+                </a:r>
+              </a:p>
+              <a:p>
+                <a:endParaRPr lang="en-US" altLang="ja-JP" sz="2400" dirty="0"/>
+              </a:p>
+              <a:p>
+                <a14:m>
+                  <m:oMath xmlns:m="http://schemas.openxmlformats.org/officeDocument/2006/math">
+                    <m:r>
+                      <a:rPr lang="en-US" altLang="ja-JP" sz="2400" b="0" i="1" smtClean="0">
+                        <a:latin typeface="Cambria Math" panose="02040503050406030204" pitchFamily="18" charset="0"/>
+                      </a:rPr>
+                      <m:t>𝑃</m:t>
+                    </m:r>
+                    <m:r>
+                      <a:rPr lang="en-US" altLang="ja-JP" sz="2400" i="1" smtClean="0">
+                        <a:latin typeface="Cambria Math" panose="02040503050406030204" pitchFamily="18" charset="0"/>
+                      </a:rPr>
+                      <m:t>𝐸</m:t>
+                    </m:r>
+                    <m:r>
+                      <a:rPr lang="en-US" altLang="ja-JP" sz="2400" i="1" smtClean="0">
+                        <a:latin typeface="Cambria Math" panose="02040503050406030204" pitchFamily="18" charset="0"/>
+                      </a:rPr>
+                      <m:t> </m:t>
+                    </m:r>
+                  </m:oMath>
+                </a14:m>
+                <a:r>
+                  <a:rPr lang="en-US" altLang="ja-JP" sz="2400" dirty="0"/>
+                  <a:t>	</a:t>
+                </a:r>
+                <a:r>
+                  <a:rPr lang="ja-JP" altLang="en-US" sz="2400" dirty="0"/>
+                  <a:t>・・・位置エネルギー</a:t>
+                </a:r>
+                <a:endParaRPr lang="en-US" altLang="ja-JP" sz="2400" dirty="0"/>
+              </a:p>
+              <a:p>
+                <a14:m>
+                  <m:oMath xmlns:m="http://schemas.openxmlformats.org/officeDocument/2006/math">
+                    <m:sSub>
+                      <m:sSubPr>
+                        <m:ctrlPr>
+                          <a:rPr lang="en-US" altLang="ja-JP" sz="2400" i="1" smtClean="0">
+                            <a:latin typeface="Cambria Math" panose="02040503050406030204" pitchFamily="18" charset="0"/>
+                          </a:rPr>
+                        </m:ctrlPr>
+                      </m:sSubPr>
+                      <m:e>
+                        <m:r>
+                          <a:rPr lang="en-US" altLang="ja-JP" sz="2400" b="0" i="1" smtClean="0">
+                            <a:latin typeface="Cambria Math" panose="02040503050406030204" pitchFamily="18" charset="0"/>
+                          </a:rPr>
+                          <m:t>𝐾𝐸</m:t>
+                        </m:r>
+                      </m:e>
+                      <m:sub>
+                        <m:r>
+                          <a:rPr lang="en-US" altLang="ja-JP" sz="2400" b="0" i="1" smtClean="0">
+                            <a:latin typeface="Cambria Math" panose="02040503050406030204" pitchFamily="18" charset="0"/>
+                          </a:rPr>
+                          <m:t>𝑇</m:t>
+                        </m:r>
+                      </m:sub>
+                    </m:sSub>
+                  </m:oMath>
+                </a14:m>
+                <a:r>
+                  <a:rPr lang="en-US" altLang="ja-JP" sz="2400" dirty="0"/>
+                  <a:t>	</a:t>
+                </a:r>
+                <a:r>
+                  <a:rPr lang="ja-JP" altLang="en-US" sz="2400" dirty="0"/>
+                  <a:t>・・・直線運動エネルギー</a:t>
+                </a:r>
+                <a:endParaRPr lang="en-US" altLang="ja-JP" sz="2400" dirty="0"/>
+              </a:p>
+              <a:p>
+                <a14:m>
+                  <m:oMath xmlns:m="http://schemas.openxmlformats.org/officeDocument/2006/math">
+                    <m:sSub>
+                      <m:sSubPr>
+                        <m:ctrlPr>
+                          <a:rPr lang="en-US" altLang="ja-JP" sz="2400" i="1" smtClean="0">
+                            <a:latin typeface="Cambria Math" panose="02040503050406030204" pitchFamily="18" charset="0"/>
+                          </a:rPr>
+                        </m:ctrlPr>
+                      </m:sSubPr>
+                      <m:e>
+                        <m:r>
+                          <a:rPr lang="en-US" altLang="ja-JP" sz="2400" i="1">
+                            <a:latin typeface="Cambria Math" panose="02040503050406030204" pitchFamily="18" charset="0"/>
+                          </a:rPr>
+                          <m:t>𝐾𝐸</m:t>
+                        </m:r>
+                      </m:e>
+                      <m:sub>
+                        <m:r>
+                          <a:rPr lang="en-US" altLang="ja-JP" sz="2400" b="0" i="1" smtClean="0">
+                            <a:latin typeface="Cambria Math" panose="02040503050406030204" pitchFamily="18" charset="0"/>
+                          </a:rPr>
+                          <m:t>𝑅</m:t>
+                        </m:r>
+                      </m:sub>
+                    </m:sSub>
+                  </m:oMath>
+                </a14:m>
+                <a:r>
+                  <a:rPr lang="en-US" altLang="ja-JP" sz="2400" dirty="0"/>
+                  <a:t>	</a:t>
+                </a:r>
+                <a:r>
+                  <a:rPr lang="ja-JP" altLang="en-US" sz="2400" dirty="0"/>
+                  <a:t>・・・回転運動エネルギー</a:t>
+                </a:r>
+                <a:endParaRPr lang="en-US" altLang="ja-JP" sz="2400" dirty="0"/>
+              </a:p>
+            </p:txBody>
+          </p:sp>
+        </mc:Choice>
+        <mc:Fallback xmlns="">
+          <p:sp>
+            <p:nvSpPr>
+              <p:cNvPr id="6" name="テキスト ボックス 5">
+                <a:extLst>
+                  <a:ext uri="{FF2B5EF4-FFF2-40B4-BE49-F238E27FC236}">
+                    <a16:creationId xmlns:a16="http://schemas.microsoft.com/office/drawing/2014/main" id="{55830AD6-028B-4C4E-80BF-B70DFC1C3A46}"/>
+                  </a:ext>
+                </a:extLst>
+              </p:cNvPr>
+              <p:cNvSpPr txBox="1">
+                <a:spLocks noRot="1" noChangeAspect="1" noMove="1" noResize="1" noEditPoints="1" noAdjustHandles="1" noChangeArrowheads="1" noChangeShapeType="1" noTextEdit="1"/>
+              </p:cNvSpPr>
+              <p:nvPr/>
+            </p:nvSpPr>
+            <p:spPr>
+              <a:xfrm>
+                <a:off x="567542" y="1216429"/>
+                <a:ext cx="11264622" cy="3445943"/>
+              </a:xfrm>
+              <a:prstGeom prst="rect">
+                <a:avLst/>
+              </a:prstGeom>
+              <a:blipFill>
+                <a:blip r:embed="rId2"/>
+                <a:stretch>
+                  <a:fillRect l="-812" t="-1416" b="-3186"/>
+                </a:stretch>
+              </a:blipFill>
+            </p:spPr>
+            <p:txBody>
+              <a:bodyPr/>
+              <a:lstStyle/>
+              <a:p>
+                <a:r>
+                  <a:rPr lang="ja-JP" altLang="en-US">
+                    <a:noFill/>
+                  </a:rPr>
+                  <a:t> </a:t>
+                </a:r>
+              </a:p>
+            </p:txBody>
+          </p:sp>
+        </mc:Fallback>
+      </mc:AlternateContent>
+    </p:spTree>
+    <p:extLst>
+      <p:ext uri="{BB962C8B-B14F-4D97-AF65-F5344CB8AC3E}">
+        <p14:creationId xmlns:p14="http://schemas.microsoft.com/office/powerpoint/2010/main" val="3309528577"/>
+      </p:ext>
+    </p:extLst>
+  </p:cSld>
+  <p:clrMapOvr>
+    <a:masterClrMapping/>
+  </p:clrMapOvr>
+</p:sld>
+</file>
+
+<file path=ppt/slides/slide7.xml><?xml version="1.0" encoding="utf-8"?>
+<p:sld xmlns:a="http://schemas.openxmlformats.org/drawingml/2006/main" xmlns:r="http://schemas.openxmlformats.org/officeDocument/2006/relationships" xmlns:p="http://schemas.openxmlformats.org/presentationml/2006/main">
+  <p:cSld>
+    <p:spTree>
+      <p:nvGrpSpPr>
+        <p:cNvPr id="1" name=""/>
+        <p:cNvGrpSpPr/>
+        <p:nvPr/>
+      </p:nvGrpSpPr>
+      <p:grpSpPr>
+        <a:xfrm>
+          <a:off x="0" y="0"/>
+          <a:ext cx="0" cy="0"/>
+          <a:chOff x="0" y="0"/>
+          <a:chExt cx="0" cy="0"/>
+        </a:xfrm>
+      </p:grpSpPr>
+      <p:sp>
+        <p:nvSpPr>
+          <p:cNvPr id="4" name="テキスト ボックス 3">
+            <a:extLst>
+              <a:ext uri="{FF2B5EF4-FFF2-40B4-BE49-F238E27FC236}">
+                <a16:creationId xmlns:a16="http://schemas.microsoft.com/office/drawing/2014/main" id="{5A13BF46-B8C5-48AA-8308-C9ECFF431A18}"/>
+              </a:ext>
+            </a:extLst>
+          </p:cNvPr>
+          <p:cNvSpPr txBox="1"/>
+          <p:nvPr/>
+        </p:nvSpPr>
+        <p:spPr>
+          <a:xfrm>
+            <a:off x="567542" y="491954"/>
+            <a:ext cx="2763898" cy="584775"/>
+          </a:xfrm>
+          <a:prstGeom prst="rect">
+            <a:avLst/>
+          </a:prstGeom>
+          <a:noFill/>
+        </p:spPr>
+        <p:txBody>
+          <a:bodyPr wrap="none" rtlCol="0">
+            <a:spAutoFit/>
+          </a:bodyPr>
+          <a:lstStyle/>
+          <a:p>
+            <a:r>
+              <a:rPr lang="ja-JP" altLang="en-US" sz="3200" b="1" u="sng" dirty="0"/>
+              <a:t>回転力学 例題</a:t>
+            </a:r>
+            <a:endParaRPr kumimoji="1" lang="en-US" altLang="ja-JP" sz="3200" b="1" u="sng" dirty="0"/>
+          </a:p>
+        </p:txBody>
+      </p:sp>
+      <mc:AlternateContent xmlns:mc="http://schemas.openxmlformats.org/markup-compatibility/2006">
+        <mc:Choice xmlns:a14="http://schemas.microsoft.com/office/drawing/2010/main" Requires="a14">
+          <p:sp>
+            <p:nvSpPr>
+              <p:cNvPr id="6" name="テキスト ボックス 5">
+                <a:extLst>
+                  <a:ext uri="{FF2B5EF4-FFF2-40B4-BE49-F238E27FC236}">
+                    <a16:creationId xmlns:a16="http://schemas.microsoft.com/office/drawing/2014/main" id="{55830AD6-028B-4C4E-80BF-B70DFC1C3A46}"/>
+                  </a:ext>
+                </a:extLst>
+              </p:cNvPr>
+              <p:cNvSpPr txBox="1"/>
+              <p:nvPr/>
+            </p:nvSpPr>
+            <p:spPr>
+              <a:xfrm>
+                <a:off x="567542" y="1216429"/>
+                <a:ext cx="11009424" cy="5193986"/>
+              </a:xfrm>
+              <a:prstGeom prst="rect">
+                <a:avLst/>
+              </a:prstGeom>
+              <a:noFill/>
+            </p:spPr>
+            <p:txBody>
+              <a:bodyPr wrap="none" rtlCol="0">
+                <a:spAutoFit/>
+              </a:bodyPr>
+              <a:lstStyle/>
+              <a:p>
+                <a:r>
+                  <a:rPr lang="ja-JP" altLang="en-US" sz="2400" dirty="0"/>
+                  <a:t>地上</a:t>
+                </a:r>
+                <a:r>
+                  <a:rPr lang="en-US" altLang="ja-JP" sz="2400" dirty="0"/>
+                  <a:t>10m</a:t>
+                </a:r>
+                <a:r>
+                  <a:rPr lang="ja-JP" altLang="en-US" sz="2400" dirty="0"/>
+                  <a:t>の高さの丘の上からボールを転がした。</a:t>
+                </a:r>
+                <a:endParaRPr lang="en-US" altLang="ja-JP" sz="2400" dirty="0"/>
+              </a:p>
+              <a:p>
+                <a:r>
+                  <a:rPr lang="ja-JP" altLang="en-US" sz="2400" dirty="0"/>
+                  <a:t>ボールの質量が</a:t>
+                </a:r>
+                <a:r>
+                  <a:rPr lang="en-US" altLang="ja-JP" sz="2400" dirty="0"/>
+                  <a:t>0.5kg</a:t>
+                </a:r>
+                <a:r>
+                  <a:rPr lang="ja-JP" altLang="en-US" sz="2400" dirty="0"/>
+                  <a:t>、慣性モーメントが</a:t>
+                </a:r>
+                <a:r>
+                  <a:rPr lang="en-US" altLang="ja-JP" sz="2400" dirty="0"/>
+                  <a:t>(2/5)mr</a:t>
+                </a:r>
+                <a:r>
+                  <a:rPr lang="en-US" altLang="ja-JP" sz="2400" baseline="30000" dirty="0"/>
+                  <a:t>2</a:t>
+                </a:r>
+                <a:r>
+                  <a:rPr lang="ja-JP" altLang="en-US" sz="2400" dirty="0"/>
+                  <a:t>のとき、</a:t>
+                </a:r>
+                <a:endParaRPr lang="en-US" altLang="ja-JP" sz="2400" dirty="0"/>
+              </a:p>
+              <a:p>
+                <a:r>
+                  <a:rPr lang="ja-JP" altLang="en-US" sz="2400" dirty="0"/>
+                  <a:t>地上</a:t>
+                </a:r>
+                <a:r>
+                  <a:rPr lang="en-US" altLang="ja-JP" sz="2400" dirty="0"/>
+                  <a:t>0m</a:t>
+                </a:r>
+                <a:r>
+                  <a:rPr lang="ja-JP" altLang="en-US" sz="2400" dirty="0"/>
+                  <a:t>地点のボールの速度を求めなさい。</a:t>
+                </a:r>
+                <a:endParaRPr lang="en-US" altLang="ja-JP" sz="2400" dirty="0"/>
+              </a:p>
+              <a:p>
+                <a:endParaRPr lang="en-US" altLang="ja-JP" sz="2400" dirty="0"/>
+              </a:p>
+              <a:p>
+                <a:r>
+                  <a:rPr lang="ja-JP" altLang="en-US" sz="2400" b="1" dirty="0">
+                    <a:solidFill>
+                      <a:srgbClr val="FF0000"/>
+                    </a:solidFill>
+                  </a:rPr>
+                  <a:t>■解答</a:t>
+                </a:r>
+                <a:endParaRPr lang="en-US" altLang="ja-JP" sz="2400" b="1" dirty="0">
+                  <a:solidFill>
+                    <a:srgbClr val="FF0000"/>
+                  </a:solidFill>
+                </a:endParaRPr>
+              </a:p>
+              <a:p>
+                <a14:m>
+                  <m:oMath xmlns:m="http://schemas.openxmlformats.org/officeDocument/2006/math">
+                    <m:sSub>
+                      <m:sSubPr>
+                        <m:ctrlPr>
+                          <a:rPr lang="en-US" altLang="ja-JP" sz="2400" i="1">
+                            <a:latin typeface="Cambria Math" panose="02040503050406030204" pitchFamily="18" charset="0"/>
+                          </a:rPr>
+                        </m:ctrlPr>
+                      </m:sSubPr>
+                      <m:e>
+                        <m:sSub>
+                          <m:sSubPr>
+                            <m:ctrlPr>
+                              <a:rPr lang="en-US" altLang="ja-JP" sz="2400" i="1">
+                                <a:latin typeface="Cambria Math" panose="02040503050406030204" pitchFamily="18" charset="0"/>
+                              </a:rPr>
+                            </m:ctrlPr>
+                          </m:sSubPr>
+                          <m:e>
+                            <m:r>
+                              <a:rPr lang="en-US" altLang="ja-JP" sz="2400" i="1">
+                                <a:latin typeface="Cambria Math" panose="02040503050406030204" pitchFamily="18" charset="0"/>
+                              </a:rPr>
+                              <m:t>𝑃𝐸</m:t>
+                            </m:r>
+                          </m:e>
+                          <m:sub>
+                            <m:r>
+                              <a:rPr lang="en-US" altLang="ja-JP" sz="2400" i="1">
+                                <a:latin typeface="Cambria Math" panose="02040503050406030204" pitchFamily="18" charset="0"/>
+                              </a:rPr>
+                              <m:t>𝑖</m:t>
+                            </m:r>
+                          </m:sub>
+                        </m:sSub>
+                        <m:r>
+                          <a:rPr lang="en-US" altLang="ja-JP" sz="2400" i="1">
+                            <a:latin typeface="Cambria Math" panose="02040503050406030204" pitchFamily="18" charset="0"/>
+                          </a:rPr>
+                          <m:t>+</m:t>
+                        </m:r>
+                        <m:r>
+                          <a:rPr lang="en-US" altLang="ja-JP" sz="2400" i="1">
+                            <a:latin typeface="Cambria Math" panose="02040503050406030204" pitchFamily="18" charset="0"/>
+                          </a:rPr>
+                          <m:t>𝐾𝐸</m:t>
+                        </m:r>
+                      </m:e>
+                      <m:sub>
+                        <m:r>
+                          <a:rPr lang="en-US" altLang="ja-JP" sz="2400" i="1">
+                            <a:latin typeface="Cambria Math" panose="02040503050406030204" pitchFamily="18" charset="0"/>
+                          </a:rPr>
+                          <m:t>𝑇𝑖</m:t>
+                        </m:r>
+                      </m:sub>
+                    </m:sSub>
+                    <m:r>
+                      <a:rPr lang="en-US" altLang="ja-JP" sz="2400" i="1">
+                        <a:latin typeface="Cambria Math" panose="02040503050406030204" pitchFamily="18" charset="0"/>
+                      </a:rPr>
+                      <m:t>+</m:t>
+                    </m:r>
+                    <m:sSub>
+                      <m:sSubPr>
+                        <m:ctrlPr>
+                          <a:rPr lang="en-US" altLang="ja-JP" sz="2400" i="1">
+                            <a:latin typeface="Cambria Math" panose="02040503050406030204" pitchFamily="18" charset="0"/>
+                          </a:rPr>
+                        </m:ctrlPr>
+                      </m:sSubPr>
+                      <m:e>
+                        <m:r>
+                          <a:rPr lang="en-US" altLang="ja-JP" sz="2400" i="1">
+                            <a:latin typeface="Cambria Math" panose="02040503050406030204" pitchFamily="18" charset="0"/>
+                          </a:rPr>
+                          <m:t>𝐾𝐸</m:t>
+                        </m:r>
+                      </m:e>
+                      <m:sub>
+                        <m:r>
+                          <a:rPr lang="en-US" altLang="ja-JP" sz="2400" i="1">
+                            <a:latin typeface="Cambria Math" panose="02040503050406030204" pitchFamily="18" charset="0"/>
+                          </a:rPr>
+                          <m:t>𝑅𝑖</m:t>
+                        </m:r>
+                      </m:sub>
+                    </m:sSub>
+                    <m:r>
+                      <a:rPr lang="en-US" altLang="ja-JP" sz="2400" i="1">
+                        <a:latin typeface="Cambria Math" panose="02040503050406030204" pitchFamily="18" charset="0"/>
+                      </a:rPr>
+                      <m:t>=</m:t>
+                    </m:r>
+                    <m:sSub>
+                      <m:sSubPr>
+                        <m:ctrlPr>
+                          <a:rPr lang="en-US" altLang="ja-JP" sz="2400" i="1">
+                            <a:latin typeface="Cambria Math" panose="02040503050406030204" pitchFamily="18" charset="0"/>
+                          </a:rPr>
+                        </m:ctrlPr>
+                      </m:sSubPr>
+                      <m:e>
+                        <m:sSub>
+                          <m:sSubPr>
+                            <m:ctrlPr>
+                              <a:rPr lang="en-US" altLang="ja-JP" sz="2400" i="1">
+                                <a:latin typeface="Cambria Math" panose="02040503050406030204" pitchFamily="18" charset="0"/>
+                              </a:rPr>
+                            </m:ctrlPr>
+                          </m:sSubPr>
+                          <m:e>
+                            <m:r>
+                              <a:rPr lang="en-US" altLang="ja-JP" sz="2400" i="1">
+                                <a:latin typeface="Cambria Math" panose="02040503050406030204" pitchFamily="18" charset="0"/>
+                              </a:rPr>
+                              <m:t>𝑃𝐸</m:t>
+                            </m:r>
+                          </m:e>
+                          <m:sub>
+                            <m:r>
+                              <a:rPr lang="en-US" altLang="ja-JP" sz="2400" i="1">
+                                <a:latin typeface="Cambria Math" panose="02040503050406030204" pitchFamily="18" charset="0"/>
+                              </a:rPr>
+                              <m:t>𝑓</m:t>
+                            </m:r>
+                          </m:sub>
+                        </m:sSub>
+                        <m:r>
+                          <a:rPr lang="en-US" altLang="ja-JP" sz="2400" i="1">
+                            <a:latin typeface="Cambria Math" panose="02040503050406030204" pitchFamily="18" charset="0"/>
+                          </a:rPr>
+                          <m:t>+</m:t>
+                        </m:r>
+                        <m:r>
+                          <a:rPr lang="en-US" altLang="ja-JP" sz="2400" i="1">
+                            <a:latin typeface="Cambria Math" panose="02040503050406030204" pitchFamily="18" charset="0"/>
+                          </a:rPr>
+                          <m:t>𝐾𝐸</m:t>
+                        </m:r>
+                      </m:e>
+                      <m:sub>
+                        <m:r>
+                          <a:rPr lang="en-US" altLang="ja-JP" sz="2400" i="1">
+                            <a:latin typeface="Cambria Math" panose="02040503050406030204" pitchFamily="18" charset="0"/>
+                          </a:rPr>
+                          <m:t>𝑇𝑓</m:t>
+                        </m:r>
+                      </m:sub>
+                    </m:sSub>
+                    <m:r>
+                      <a:rPr lang="en-US" altLang="ja-JP" sz="2400" i="1">
+                        <a:latin typeface="Cambria Math" panose="02040503050406030204" pitchFamily="18" charset="0"/>
+                      </a:rPr>
+                      <m:t>+</m:t>
+                    </m:r>
+                    <m:sSub>
+                      <m:sSubPr>
+                        <m:ctrlPr>
+                          <a:rPr lang="en-US" altLang="ja-JP" sz="2400" i="1">
+                            <a:latin typeface="Cambria Math" panose="02040503050406030204" pitchFamily="18" charset="0"/>
+                          </a:rPr>
+                        </m:ctrlPr>
+                      </m:sSubPr>
+                      <m:e>
+                        <m:r>
+                          <a:rPr lang="en-US" altLang="ja-JP" sz="2400" i="1">
+                            <a:latin typeface="Cambria Math" panose="02040503050406030204" pitchFamily="18" charset="0"/>
+                          </a:rPr>
+                          <m:t>𝐾𝐸</m:t>
+                        </m:r>
+                      </m:e>
+                      <m:sub>
+                        <m:r>
+                          <a:rPr lang="en-US" altLang="ja-JP" sz="2400" i="1">
+                            <a:latin typeface="Cambria Math" panose="02040503050406030204" pitchFamily="18" charset="0"/>
+                          </a:rPr>
+                          <m:t>𝑅𝑓</m:t>
+                        </m:r>
+                      </m:sub>
+                    </m:sSub>
+                  </m:oMath>
+                </a14:m>
+                <a:r>
+                  <a:rPr lang="en-US" altLang="ja-JP" sz="2400" dirty="0"/>
+                  <a:t> </a:t>
+                </a:r>
+                <a:r>
+                  <a:rPr lang="ja-JP" altLang="en-US" sz="2400" dirty="0"/>
+                  <a:t>より</a:t>
+                </a:r>
+                <a:endParaRPr lang="en-US" altLang="ja-JP" sz="2400" dirty="0"/>
+              </a:p>
+              <a:p>
+                <a14:m>
+                  <m:oMath xmlns:m="http://schemas.openxmlformats.org/officeDocument/2006/math">
+                    <m:r>
+                      <a:rPr lang="en-US" altLang="ja-JP" sz="2400" b="0" i="1" smtClean="0">
+                        <a:solidFill>
+                          <a:schemeClr val="tx1"/>
+                        </a:solidFill>
+                        <a:latin typeface="Cambria Math" panose="02040503050406030204" pitchFamily="18" charset="0"/>
+                      </a:rPr>
+                      <m:t>𝑚𝑔𝑦</m:t>
+                    </m:r>
+                    <m:r>
+                      <a:rPr lang="en-US" altLang="ja-JP" sz="2400" b="0" i="1" baseline="-25000" smtClean="0">
+                        <a:solidFill>
+                          <a:schemeClr val="tx1"/>
+                        </a:solidFill>
+                        <a:latin typeface="Cambria Math" panose="02040503050406030204" pitchFamily="18" charset="0"/>
+                      </a:rPr>
+                      <m:t>𝑖</m:t>
+                    </m:r>
+                    <m:r>
+                      <a:rPr lang="en-US" altLang="ja-JP" sz="2400" b="0" i="1" smtClean="0">
+                        <a:solidFill>
+                          <a:schemeClr val="tx1"/>
+                        </a:solidFill>
+                        <a:latin typeface="Cambria Math" panose="02040503050406030204" pitchFamily="18" charset="0"/>
+                      </a:rPr>
+                      <m:t>+</m:t>
+                    </m:r>
+                    <m:f>
+                      <m:fPr>
+                        <m:ctrlPr>
+                          <a:rPr lang="en-US" altLang="ja-JP" sz="2400" b="0" i="1" smtClean="0">
+                            <a:solidFill>
+                              <a:schemeClr val="tx1"/>
+                            </a:solidFill>
+                            <a:latin typeface="Cambria Math" panose="02040503050406030204" pitchFamily="18" charset="0"/>
+                          </a:rPr>
+                        </m:ctrlPr>
+                      </m:fPr>
+                      <m:num>
+                        <m:r>
+                          <a:rPr lang="en-US" altLang="ja-JP" sz="2400" b="0" i="1" smtClean="0">
+                            <a:solidFill>
+                              <a:schemeClr val="tx1"/>
+                            </a:solidFill>
+                            <a:latin typeface="Cambria Math" panose="02040503050406030204" pitchFamily="18" charset="0"/>
+                          </a:rPr>
+                          <m:t>1</m:t>
+                        </m:r>
+                      </m:num>
+                      <m:den>
+                        <m:r>
+                          <a:rPr lang="en-US" altLang="ja-JP" sz="2400" b="0" i="1" smtClean="0">
+                            <a:solidFill>
+                              <a:schemeClr val="tx1"/>
+                            </a:solidFill>
+                            <a:latin typeface="Cambria Math" panose="02040503050406030204" pitchFamily="18" charset="0"/>
+                          </a:rPr>
+                          <m:t>2</m:t>
+                        </m:r>
+                      </m:den>
+                    </m:f>
+                    <m:r>
+                      <a:rPr lang="en-US" altLang="ja-JP" sz="2400" b="0" i="1" smtClean="0">
+                        <a:solidFill>
+                          <a:schemeClr val="tx1"/>
+                        </a:solidFill>
+                        <a:latin typeface="Cambria Math" panose="02040503050406030204" pitchFamily="18" charset="0"/>
+                      </a:rPr>
+                      <m:t>𝑚𝑣</m:t>
+                    </m:r>
+                    <m:r>
+                      <a:rPr lang="en-US" altLang="ja-JP" sz="2400" b="0" i="1" baseline="-25000" smtClean="0">
+                        <a:solidFill>
+                          <a:schemeClr val="tx1"/>
+                        </a:solidFill>
+                        <a:latin typeface="Cambria Math" panose="02040503050406030204" pitchFamily="18" charset="0"/>
+                      </a:rPr>
+                      <m:t>𝑖</m:t>
+                    </m:r>
+                    <m:r>
+                      <a:rPr lang="en-US" altLang="ja-JP" sz="2400" b="0" i="1" baseline="30000" smtClean="0">
+                        <a:solidFill>
+                          <a:schemeClr val="tx1"/>
+                        </a:solidFill>
+                        <a:latin typeface="Cambria Math" panose="02040503050406030204" pitchFamily="18" charset="0"/>
+                      </a:rPr>
+                      <m:t>2</m:t>
+                    </m:r>
+                    <m:r>
+                      <a:rPr lang="en-US" altLang="ja-JP" sz="2400" b="0" i="1" smtClean="0">
+                        <a:solidFill>
+                          <a:schemeClr val="tx1"/>
+                        </a:solidFill>
+                        <a:latin typeface="Cambria Math" panose="02040503050406030204" pitchFamily="18" charset="0"/>
+                      </a:rPr>
+                      <m:t>+</m:t>
+                    </m:r>
+                    <m:f>
+                      <m:fPr>
+                        <m:ctrlPr>
+                          <a:rPr lang="en-US" altLang="ja-JP" sz="2400" b="0" i="1" smtClean="0">
+                            <a:solidFill>
+                              <a:schemeClr val="tx1"/>
+                            </a:solidFill>
+                            <a:latin typeface="Cambria Math" panose="02040503050406030204" pitchFamily="18" charset="0"/>
+                          </a:rPr>
+                        </m:ctrlPr>
+                      </m:fPr>
+                      <m:num>
+                        <m:r>
+                          <a:rPr lang="en-US" altLang="ja-JP" sz="2400" b="0" i="1" smtClean="0">
+                            <a:solidFill>
+                              <a:schemeClr val="tx1"/>
+                            </a:solidFill>
+                            <a:latin typeface="Cambria Math" panose="02040503050406030204" pitchFamily="18" charset="0"/>
+                          </a:rPr>
+                          <m:t>1</m:t>
+                        </m:r>
+                      </m:num>
+                      <m:den>
+                        <m:r>
+                          <a:rPr lang="en-US" altLang="ja-JP" sz="2400" b="0" i="1" smtClean="0">
+                            <a:solidFill>
+                              <a:schemeClr val="tx1"/>
+                            </a:solidFill>
+                            <a:latin typeface="Cambria Math" panose="02040503050406030204" pitchFamily="18" charset="0"/>
+                          </a:rPr>
+                          <m:t>2</m:t>
+                        </m:r>
+                      </m:den>
+                    </m:f>
+                    <m:r>
+                      <a:rPr lang="en-US" altLang="ja-JP" sz="2400" b="0" i="1" smtClean="0">
+                        <a:solidFill>
+                          <a:schemeClr val="tx1"/>
+                        </a:solidFill>
+                        <a:latin typeface="Cambria Math" panose="02040503050406030204" pitchFamily="18" charset="0"/>
+                      </a:rPr>
+                      <m:t>𝐼</m:t>
+                    </m:r>
+                    <m:r>
+                      <m:rPr>
+                        <m:sty m:val="p"/>
+                      </m:rPr>
+                      <a:rPr lang="en-US" altLang="ja-JP" sz="2400" i="1">
+                        <a:solidFill>
+                          <a:schemeClr val="tx1"/>
+                        </a:solidFill>
+                        <a:latin typeface="Cambria Math" panose="02040503050406030204" pitchFamily="18" charset="0"/>
+                      </a:rPr>
+                      <m:t>ω</m:t>
+                    </m:r>
+                    <m:r>
+                      <a:rPr lang="en-US" altLang="ja-JP" sz="2400" b="0" i="1" baseline="-25000" smtClean="0">
+                        <a:solidFill>
+                          <a:schemeClr val="tx1"/>
+                        </a:solidFill>
+                        <a:latin typeface="Cambria Math" panose="02040503050406030204" pitchFamily="18" charset="0"/>
+                      </a:rPr>
+                      <m:t>𝑖</m:t>
+                    </m:r>
+                    <m:r>
+                      <a:rPr lang="en-US" altLang="ja-JP" sz="2400" b="0" i="1" baseline="30000" smtClean="0">
+                        <a:solidFill>
+                          <a:schemeClr val="tx1"/>
+                        </a:solidFill>
+                        <a:latin typeface="Cambria Math" panose="02040503050406030204" pitchFamily="18" charset="0"/>
+                      </a:rPr>
+                      <m:t>2</m:t>
+                    </m:r>
+                    <m:r>
+                      <a:rPr lang="en-US" altLang="ja-JP" sz="2400" b="0" i="1" smtClean="0">
+                        <a:solidFill>
+                          <a:schemeClr val="tx1"/>
+                        </a:solidFill>
+                        <a:latin typeface="Cambria Math" panose="02040503050406030204" pitchFamily="18" charset="0"/>
+                      </a:rPr>
+                      <m:t>=</m:t>
+                    </m:r>
+                    <m:r>
+                      <a:rPr lang="en-US" altLang="ja-JP" sz="2400" i="1" smtClean="0">
+                        <a:solidFill>
+                          <a:schemeClr val="tx1"/>
+                        </a:solidFill>
+                        <a:latin typeface="Cambria Math" panose="02040503050406030204" pitchFamily="18" charset="0"/>
+                      </a:rPr>
+                      <m:t>𝑚𝑔𝑦</m:t>
+                    </m:r>
+                    <m:r>
+                      <a:rPr lang="en-US" altLang="ja-JP" sz="2400" b="0" i="1" baseline="-25000" smtClean="0">
+                        <a:solidFill>
+                          <a:schemeClr val="tx1"/>
+                        </a:solidFill>
+                        <a:latin typeface="Cambria Math" panose="02040503050406030204" pitchFamily="18" charset="0"/>
+                      </a:rPr>
+                      <m:t>𝑓</m:t>
+                    </m:r>
+                    <m:r>
+                      <a:rPr lang="en-US" altLang="ja-JP" sz="2400" i="1">
+                        <a:solidFill>
+                          <a:schemeClr val="tx1"/>
+                        </a:solidFill>
+                        <a:latin typeface="Cambria Math" panose="02040503050406030204" pitchFamily="18" charset="0"/>
+                      </a:rPr>
+                      <m:t>+</m:t>
+                    </m:r>
+                    <m:f>
+                      <m:fPr>
+                        <m:ctrlPr>
+                          <a:rPr lang="en-US" altLang="ja-JP" sz="2400" i="1">
+                            <a:solidFill>
+                              <a:schemeClr val="tx1"/>
+                            </a:solidFill>
+                            <a:latin typeface="Cambria Math" panose="02040503050406030204" pitchFamily="18" charset="0"/>
+                          </a:rPr>
+                        </m:ctrlPr>
+                      </m:fPr>
+                      <m:num>
+                        <m:r>
+                          <a:rPr lang="en-US" altLang="ja-JP" sz="2400" i="1">
+                            <a:solidFill>
+                              <a:schemeClr val="tx1"/>
+                            </a:solidFill>
+                            <a:latin typeface="Cambria Math" panose="02040503050406030204" pitchFamily="18" charset="0"/>
+                          </a:rPr>
+                          <m:t>1</m:t>
+                        </m:r>
+                      </m:num>
+                      <m:den>
+                        <m:r>
+                          <a:rPr lang="en-US" altLang="ja-JP" sz="2400" i="1">
+                            <a:solidFill>
+                              <a:schemeClr val="tx1"/>
+                            </a:solidFill>
+                            <a:latin typeface="Cambria Math" panose="02040503050406030204" pitchFamily="18" charset="0"/>
+                          </a:rPr>
+                          <m:t>2</m:t>
+                        </m:r>
+                      </m:den>
+                    </m:f>
+                    <m:r>
+                      <a:rPr lang="en-US" altLang="ja-JP" sz="2400" i="1">
+                        <a:solidFill>
+                          <a:schemeClr val="tx1"/>
+                        </a:solidFill>
+                        <a:latin typeface="Cambria Math" panose="02040503050406030204" pitchFamily="18" charset="0"/>
+                      </a:rPr>
+                      <m:t>𝑚𝑣</m:t>
+                    </m:r>
+                    <m:r>
+                      <a:rPr lang="en-US" altLang="ja-JP" sz="2400" b="0" i="1" baseline="-25000" smtClean="0">
+                        <a:solidFill>
+                          <a:schemeClr val="tx1"/>
+                        </a:solidFill>
+                        <a:latin typeface="Cambria Math" panose="02040503050406030204" pitchFamily="18" charset="0"/>
+                      </a:rPr>
+                      <m:t>𝑓</m:t>
+                    </m:r>
+                    <m:r>
+                      <a:rPr lang="en-US" altLang="ja-JP" sz="2400" i="1" baseline="30000">
+                        <a:solidFill>
+                          <a:schemeClr val="tx1"/>
+                        </a:solidFill>
+                        <a:latin typeface="Cambria Math" panose="02040503050406030204" pitchFamily="18" charset="0"/>
+                      </a:rPr>
+                      <m:t>2</m:t>
+                    </m:r>
+                    <m:r>
+                      <a:rPr lang="en-US" altLang="ja-JP" sz="2400" i="1">
+                        <a:solidFill>
+                          <a:schemeClr val="tx1"/>
+                        </a:solidFill>
+                        <a:latin typeface="Cambria Math" panose="02040503050406030204" pitchFamily="18" charset="0"/>
+                      </a:rPr>
+                      <m:t>+</m:t>
+                    </m:r>
+                    <m:f>
+                      <m:fPr>
+                        <m:ctrlPr>
+                          <a:rPr lang="en-US" altLang="ja-JP" sz="2400" i="1">
+                            <a:solidFill>
+                              <a:schemeClr val="tx1"/>
+                            </a:solidFill>
+                            <a:latin typeface="Cambria Math" panose="02040503050406030204" pitchFamily="18" charset="0"/>
+                          </a:rPr>
+                        </m:ctrlPr>
+                      </m:fPr>
+                      <m:num>
+                        <m:r>
+                          <a:rPr lang="en-US" altLang="ja-JP" sz="2400" i="1">
+                            <a:solidFill>
+                              <a:schemeClr val="tx1"/>
+                            </a:solidFill>
+                            <a:latin typeface="Cambria Math" panose="02040503050406030204" pitchFamily="18" charset="0"/>
+                          </a:rPr>
+                          <m:t>1</m:t>
+                        </m:r>
+                      </m:num>
+                      <m:den>
+                        <m:r>
+                          <a:rPr lang="en-US" altLang="ja-JP" sz="2400" i="1">
+                            <a:solidFill>
+                              <a:schemeClr val="tx1"/>
+                            </a:solidFill>
+                            <a:latin typeface="Cambria Math" panose="02040503050406030204" pitchFamily="18" charset="0"/>
+                          </a:rPr>
+                          <m:t>2</m:t>
+                        </m:r>
+                      </m:den>
+                    </m:f>
+                    <m:r>
+                      <a:rPr lang="en-US" altLang="ja-JP" sz="2400" i="1">
+                        <a:solidFill>
+                          <a:schemeClr val="tx1"/>
+                        </a:solidFill>
+                        <a:latin typeface="Cambria Math" panose="02040503050406030204" pitchFamily="18" charset="0"/>
+                      </a:rPr>
+                      <m:t>𝐼</m:t>
+                    </m:r>
+                    <m:r>
+                      <m:rPr>
+                        <m:sty m:val="p"/>
+                      </m:rPr>
+                      <a:rPr lang="en-US" altLang="ja-JP" sz="2400" i="1">
+                        <a:solidFill>
+                          <a:schemeClr val="tx1"/>
+                        </a:solidFill>
+                        <a:latin typeface="Cambria Math" panose="02040503050406030204" pitchFamily="18" charset="0"/>
+                      </a:rPr>
+                      <m:t>ω</m:t>
+                    </m:r>
+                    <m:r>
+                      <a:rPr lang="en-US" altLang="ja-JP" sz="2400" b="0" i="1" baseline="-25000" smtClean="0">
+                        <a:solidFill>
+                          <a:schemeClr val="tx1"/>
+                        </a:solidFill>
+                        <a:latin typeface="Cambria Math" panose="02040503050406030204" pitchFamily="18" charset="0"/>
+                      </a:rPr>
+                      <m:t>𝑓</m:t>
+                    </m:r>
+                    <m:r>
+                      <a:rPr lang="en-US" altLang="ja-JP" sz="2400" i="1" baseline="30000">
+                        <a:solidFill>
+                          <a:schemeClr val="tx1"/>
+                        </a:solidFill>
+                        <a:latin typeface="Cambria Math" panose="02040503050406030204" pitchFamily="18" charset="0"/>
+                      </a:rPr>
+                      <m:t>2</m:t>
+                    </m:r>
+                  </m:oMath>
+                </a14:m>
+                <a:r>
+                  <a:rPr lang="en-US" altLang="ja-JP" sz="2400" dirty="0">
+                    <a:solidFill>
+                      <a:schemeClr val="tx1"/>
+                    </a:solidFill>
+                  </a:rPr>
+                  <a:t> </a:t>
+                </a:r>
+                <a:r>
+                  <a:rPr lang="ja-JP" altLang="en-US" sz="2000" dirty="0"/>
+                  <a:t>変位、質量、重力加速度を代入すると</a:t>
+                </a:r>
+                <a:endParaRPr lang="en-US" altLang="ja-JP" sz="2400" dirty="0">
+                  <a:solidFill>
+                    <a:schemeClr val="tx1"/>
+                  </a:solidFill>
+                </a:endParaRPr>
+              </a:p>
+              <a:p>
+                <a14:m>
+                  <m:oMath xmlns:m="http://schemas.openxmlformats.org/officeDocument/2006/math">
+                    <m:r>
+                      <a:rPr lang="en-US" altLang="ja-JP" sz="2400" b="0" i="1" smtClean="0">
+                        <a:solidFill>
+                          <a:schemeClr val="tx1"/>
+                        </a:solidFill>
+                        <a:latin typeface="Cambria Math" panose="02040503050406030204" pitchFamily="18" charset="0"/>
+                      </a:rPr>
+                      <m:t>(0.5)(−9.8)(10)+(</m:t>
+                    </m:r>
+                    <m:f>
+                      <m:fPr>
+                        <m:ctrlPr>
+                          <a:rPr lang="en-US" altLang="ja-JP" sz="2400" b="0" i="1" smtClean="0">
+                            <a:solidFill>
+                              <a:schemeClr val="tx1"/>
+                            </a:solidFill>
+                            <a:latin typeface="Cambria Math" panose="02040503050406030204" pitchFamily="18" charset="0"/>
+                          </a:rPr>
+                        </m:ctrlPr>
+                      </m:fPr>
+                      <m:num>
+                        <m:r>
+                          <a:rPr lang="en-US" altLang="ja-JP" sz="2400" b="0" i="1" smtClean="0">
+                            <a:solidFill>
+                              <a:schemeClr val="tx1"/>
+                            </a:solidFill>
+                            <a:latin typeface="Cambria Math" panose="02040503050406030204" pitchFamily="18" charset="0"/>
+                          </a:rPr>
+                          <m:t>1</m:t>
+                        </m:r>
+                      </m:num>
+                      <m:den>
+                        <m:r>
+                          <a:rPr lang="en-US" altLang="ja-JP" sz="2400" b="0" i="1" smtClean="0">
+                            <a:solidFill>
+                              <a:schemeClr val="tx1"/>
+                            </a:solidFill>
+                            <a:latin typeface="Cambria Math" panose="02040503050406030204" pitchFamily="18" charset="0"/>
+                          </a:rPr>
+                          <m:t>2</m:t>
+                        </m:r>
+                      </m:den>
+                    </m:f>
+                    <m:r>
+                      <a:rPr lang="en-US" altLang="ja-JP" sz="2400" b="0" i="1" smtClean="0">
+                        <a:solidFill>
+                          <a:schemeClr val="tx1"/>
+                        </a:solidFill>
+                        <a:latin typeface="Cambria Math" panose="02040503050406030204" pitchFamily="18" charset="0"/>
+                      </a:rPr>
+                      <m:t>)(0.5)(0)</m:t>
+                    </m:r>
+                    <m:r>
+                      <a:rPr lang="en-US" altLang="ja-JP" sz="2400" b="0" i="1" baseline="30000" smtClean="0">
+                        <a:solidFill>
+                          <a:schemeClr val="tx1"/>
+                        </a:solidFill>
+                        <a:latin typeface="Cambria Math" panose="02040503050406030204" pitchFamily="18" charset="0"/>
+                      </a:rPr>
+                      <m:t>2</m:t>
+                    </m:r>
+                    <m:r>
+                      <a:rPr lang="en-US" altLang="ja-JP" sz="2400" b="0" i="1" smtClean="0">
+                        <a:solidFill>
+                          <a:schemeClr val="tx1"/>
+                        </a:solidFill>
+                        <a:latin typeface="Cambria Math" panose="02040503050406030204" pitchFamily="18" charset="0"/>
+                      </a:rPr>
+                      <m:t>+</m:t>
+                    </m:r>
+                    <m:f>
+                      <m:fPr>
+                        <m:ctrlPr>
+                          <a:rPr lang="en-US" altLang="ja-JP" sz="2400" b="0" i="1" smtClean="0">
+                            <a:solidFill>
+                              <a:schemeClr val="tx1"/>
+                            </a:solidFill>
+                            <a:latin typeface="Cambria Math" panose="02040503050406030204" pitchFamily="18" charset="0"/>
+                          </a:rPr>
+                        </m:ctrlPr>
+                      </m:fPr>
+                      <m:num>
+                        <m:r>
+                          <a:rPr lang="en-US" altLang="ja-JP" sz="2400" b="0" i="1" smtClean="0">
+                            <a:solidFill>
+                              <a:schemeClr val="tx1"/>
+                            </a:solidFill>
+                            <a:latin typeface="Cambria Math" panose="02040503050406030204" pitchFamily="18" charset="0"/>
+                          </a:rPr>
+                          <m:t>1</m:t>
+                        </m:r>
+                      </m:num>
+                      <m:den>
+                        <m:r>
+                          <a:rPr lang="en-US" altLang="ja-JP" sz="2400" b="0" i="1" smtClean="0">
+                            <a:solidFill>
+                              <a:schemeClr val="tx1"/>
+                            </a:solidFill>
+                            <a:latin typeface="Cambria Math" panose="02040503050406030204" pitchFamily="18" charset="0"/>
+                          </a:rPr>
+                          <m:t>2</m:t>
+                        </m:r>
+                      </m:den>
+                    </m:f>
+                    <m:r>
+                      <a:rPr lang="en-US" altLang="ja-JP" sz="2400" b="0" i="1" smtClean="0">
+                        <a:solidFill>
+                          <a:schemeClr val="tx1"/>
+                        </a:solidFill>
+                        <a:latin typeface="Cambria Math" panose="02040503050406030204" pitchFamily="18" charset="0"/>
+                      </a:rPr>
+                      <m:t>𝐼</m:t>
+                    </m:r>
+                    <m:r>
+                      <a:rPr lang="en-US" altLang="ja-JP" sz="2400" b="0" i="1" smtClean="0">
+                        <a:solidFill>
+                          <a:schemeClr val="tx1"/>
+                        </a:solidFill>
+                        <a:latin typeface="Cambria Math" panose="02040503050406030204" pitchFamily="18" charset="0"/>
+                      </a:rPr>
+                      <m:t>(0)2=(0</m:t>
+                    </m:r>
+                    <m:r>
+                      <a:rPr lang="en-US" altLang="ja-JP" sz="2400" b="0" i="1" smtClean="0">
+                        <a:solidFill>
+                          <a:schemeClr val="tx1"/>
+                        </a:solidFill>
+                        <a:latin typeface="Cambria Math" panose="02040503050406030204" pitchFamily="18" charset="0"/>
+                      </a:rPr>
+                      <m:t>.5)(−9.8)(0)+(</m:t>
+                    </m:r>
+                    <m:f>
+                      <m:fPr>
+                        <m:ctrlPr>
+                          <a:rPr lang="en-US" altLang="ja-JP" sz="2400" i="1">
+                            <a:solidFill>
+                              <a:schemeClr val="tx1"/>
+                            </a:solidFill>
+                            <a:latin typeface="Cambria Math" panose="02040503050406030204" pitchFamily="18" charset="0"/>
+                          </a:rPr>
+                        </m:ctrlPr>
+                      </m:fPr>
+                      <m:num>
+                        <m:r>
+                          <a:rPr lang="en-US" altLang="ja-JP" sz="2400" i="1">
+                            <a:solidFill>
+                              <a:schemeClr val="tx1"/>
+                            </a:solidFill>
+                            <a:latin typeface="Cambria Math" panose="02040503050406030204" pitchFamily="18" charset="0"/>
+                          </a:rPr>
+                          <m:t>1</m:t>
+                        </m:r>
+                      </m:num>
+                      <m:den>
+                        <m:r>
+                          <a:rPr lang="en-US" altLang="ja-JP" sz="2400" i="1">
+                            <a:solidFill>
+                              <a:schemeClr val="tx1"/>
+                            </a:solidFill>
+                            <a:latin typeface="Cambria Math" panose="02040503050406030204" pitchFamily="18" charset="0"/>
+                          </a:rPr>
+                          <m:t>2</m:t>
+                        </m:r>
+                      </m:den>
+                    </m:f>
+                    <m:r>
+                      <a:rPr lang="en-US" altLang="ja-JP" sz="2400" b="0" i="1" smtClean="0">
+                        <a:solidFill>
+                          <a:schemeClr val="tx1"/>
+                        </a:solidFill>
+                        <a:latin typeface="Cambria Math" panose="02040503050406030204" pitchFamily="18" charset="0"/>
+                      </a:rPr>
+                      <m:t>)(0.5)</m:t>
+                    </m:r>
+                    <m:r>
+                      <a:rPr lang="en-US" altLang="ja-JP" sz="2400" i="1">
+                        <a:solidFill>
+                          <a:schemeClr val="tx1"/>
+                        </a:solidFill>
+                        <a:latin typeface="Cambria Math" panose="02040503050406030204" pitchFamily="18" charset="0"/>
+                      </a:rPr>
+                      <m:t>𝑣</m:t>
+                    </m:r>
+                    <m:r>
+                      <a:rPr lang="en-US" altLang="ja-JP" sz="2400" b="0" i="1" baseline="-25000" smtClean="0">
+                        <a:solidFill>
+                          <a:schemeClr val="tx1"/>
+                        </a:solidFill>
+                        <a:latin typeface="Cambria Math" panose="02040503050406030204" pitchFamily="18" charset="0"/>
+                      </a:rPr>
+                      <m:t>𝑓</m:t>
+                    </m:r>
+                    <m:r>
+                      <a:rPr lang="en-US" altLang="ja-JP" sz="2400" i="1" baseline="30000">
+                        <a:solidFill>
+                          <a:schemeClr val="tx1"/>
+                        </a:solidFill>
+                        <a:latin typeface="Cambria Math" panose="02040503050406030204" pitchFamily="18" charset="0"/>
+                      </a:rPr>
+                      <m:t>2</m:t>
+                    </m:r>
+                    <m:r>
+                      <a:rPr lang="en-US" altLang="ja-JP" sz="2400" i="1">
+                        <a:solidFill>
+                          <a:schemeClr val="tx1"/>
+                        </a:solidFill>
+                        <a:latin typeface="Cambria Math" panose="02040503050406030204" pitchFamily="18" charset="0"/>
+                      </a:rPr>
+                      <m:t>+</m:t>
+                    </m:r>
+                    <m:f>
+                      <m:fPr>
+                        <m:ctrlPr>
+                          <a:rPr lang="en-US" altLang="ja-JP" sz="2400" i="1">
+                            <a:solidFill>
+                              <a:schemeClr val="tx1"/>
+                            </a:solidFill>
+                            <a:latin typeface="Cambria Math" panose="02040503050406030204" pitchFamily="18" charset="0"/>
+                          </a:rPr>
+                        </m:ctrlPr>
+                      </m:fPr>
+                      <m:num>
+                        <m:r>
+                          <a:rPr lang="en-US" altLang="ja-JP" sz="2400" i="1">
+                            <a:solidFill>
+                              <a:schemeClr val="tx1"/>
+                            </a:solidFill>
+                            <a:latin typeface="Cambria Math" panose="02040503050406030204" pitchFamily="18" charset="0"/>
+                          </a:rPr>
+                          <m:t>1</m:t>
+                        </m:r>
+                      </m:num>
+                      <m:den>
+                        <m:r>
+                          <a:rPr lang="en-US" altLang="ja-JP" sz="2400" i="1">
+                            <a:solidFill>
+                              <a:schemeClr val="tx1"/>
+                            </a:solidFill>
+                            <a:latin typeface="Cambria Math" panose="02040503050406030204" pitchFamily="18" charset="0"/>
+                          </a:rPr>
+                          <m:t>2</m:t>
+                        </m:r>
+                      </m:den>
+                    </m:f>
+                    <m:r>
+                      <a:rPr lang="en-US" altLang="ja-JP" sz="2400" i="1">
+                        <a:solidFill>
+                          <a:schemeClr val="tx1"/>
+                        </a:solidFill>
+                        <a:latin typeface="Cambria Math" panose="02040503050406030204" pitchFamily="18" charset="0"/>
+                      </a:rPr>
+                      <m:t>𝐼</m:t>
+                    </m:r>
+                    <m:r>
+                      <m:rPr>
+                        <m:sty m:val="p"/>
+                      </m:rPr>
+                      <a:rPr lang="en-US" altLang="ja-JP" sz="2400" i="1">
+                        <a:solidFill>
+                          <a:schemeClr val="tx1"/>
+                        </a:solidFill>
+                        <a:latin typeface="Cambria Math" panose="02040503050406030204" pitchFamily="18" charset="0"/>
+                      </a:rPr>
+                      <m:t>ω</m:t>
+                    </m:r>
+                    <m:r>
+                      <a:rPr lang="en-US" altLang="ja-JP" sz="2400" b="0" i="1" baseline="-25000" smtClean="0">
+                        <a:solidFill>
+                          <a:schemeClr val="tx1"/>
+                        </a:solidFill>
+                        <a:latin typeface="Cambria Math" panose="02040503050406030204" pitchFamily="18" charset="0"/>
+                      </a:rPr>
+                      <m:t>𝑓</m:t>
+                    </m:r>
+                    <m:r>
+                      <a:rPr lang="en-US" altLang="ja-JP" sz="2400" i="1" baseline="30000">
+                        <a:solidFill>
+                          <a:schemeClr val="tx1"/>
+                        </a:solidFill>
+                        <a:latin typeface="Cambria Math" panose="02040503050406030204" pitchFamily="18" charset="0"/>
+                      </a:rPr>
+                      <m:t>2</m:t>
+                    </m:r>
+                  </m:oMath>
+                </a14:m>
+                <a:r>
+                  <a:rPr lang="en-US" altLang="ja-JP" sz="2400" dirty="0">
+                    <a:solidFill>
+                      <a:schemeClr val="tx1"/>
+                    </a:solidFill>
+                  </a:rPr>
+                  <a:t> </a:t>
+                </a:r>
+              </a:p>
+              <a:p>
+                <a14:m>
+                  <m:oMath xmlns:m="http://schemas.openxmlformats.org/officeDocument/2006/math">
+                    <m:r>
+                      <a:rPr lang="en-US" altLang="ja-JP" sz="2400" b="0" i="1" smtClean="0">
+                        <a:latin typeface="Cambria Math" panose="02040503050406030204" pitchFamily="18" charset="0"/>
+                      </a:rPr>
+                      <m:t>49=0.25</m:t>
+                    </m:r>
+                    <m:r>
+                      <a:rPr lang="en-US" altLang="ja-JP" sz="2400" i="1">
+                        <a:latin typeface="Cambria Math" panose="02040503050406030204" pitchFamily="18" charset="0"/>
+                      </a:rPr>
+                      <m:t>𝑣</m:t>
+                    </m:r>
+                    <m:r>
+                      <a:rPr lang="en-US" altLang="ja-JP" sz="2400" i="1" baseline="-25000">
+                        <a:latin typeface="Cambria Math" panose="02040503050406030204" pitchFamily="18" charset="0"/>
+                      </a:rPr>
+                      <m:t>𝑓</m:t>
+                    </m:r>
+                    <m:r>
+                      <a:rPr lang="en-US" altLang="ja-JP" sz="2400" i="1" baseline="30000">
+                        <a:latin typeface="Cambria Math" panose="02040503050406030204" pitchFamily="18" charset="0"/>
+                      </a:rPr>
+                      <m:t>2</m:t>
+                    </m:r>
+                    <m:r>
+                      <a:rPr lang="en-US" altLang="ja-JP" sz="2400" b="0" i="1" smtClean="0">
+                        <a:latin typeface="Cambria Math" panose="02040503050406030204" pitchFamily="18" charset="0"/>
+                      </a:rPr>
+                      <m:t>+</m:t>
+                    </m:r>
+                    <m:f>
+                      <m:fPr>
+                        <m:ctrlPr>
+                          <a:rPr lang="en-US" altLang="ja-JP" sz="2400" i="1">
+                            <a:latin typeface="Cambria Math" panose="02040503050406030204" pitchFamily="18" charset="0"/>
+                          </a:rPr>
+                        </m:ctrlPr>
+                      </m:fPr>
+                      <m:num>
+                        <m:r>
+                          <a:rPr lang="en-US" altLang="ja-JP" sz="2400" i="1">
+                            <a:latin typeface="Cambria Math" panose="02040503050406030204" pitchFamily="18" charset="0"/>
+                          </a:rPr>
+                          <m:t>1</m:t>
+                        </m:r>
+                      </m:num>
+                      <m:den>
+                        <m:r>
+                          <a:rPr lang="en-US" altLang="ja-JP" sz="2400" i="1">
+                            <a:latin typeface="Cambria Math" panose="02040503050406030204" pitchFamily="18" charset="0"/>
+                          </a:rPr>
+                          <m:t>2</m:t>
+                        </m:r>
+                      </m:den>
+                    </m:f>
+                    <m:r>
+                      <a:rPr lang="en-US" altLang="ja-JP" sz="2400" i="1">
+                        <a:latin typeface="Cambria Math" panose="02040503050406030204" pitchFamily="18" charset="0"/>
+                      </a:rPr>
+                      <m:t>𝐼</m:t>
+                    </m:r>
+                    <m:r>
+                      <m:rPr>
+                        <m:sty m:val="p"/>
+                      </m:rPr>
+                      <a:rPr lang="en-US" altLang="ja-JP" sz="2400" i="1">
+                        <a:latin typeface="Cambria Math" panose="02040503050406030204" pitchFamily="18" charset="0"/>
+                      </a:rPr>
+                      <m:t>ω</m:t>
+                    </m:r>
+                    <m:r>
+                      <a:rPr lang="en-US" altLang="ja-JP" sz="2400" i="1" baseline="-25000">
+                        <a:latin typeface="Cambria Math" panose="02040503050406030204" pitchFamily="18" charset="0"/>
+                      </a:rPr>
+                      <m:t>𝑓</m:t>
+                    </m:r>
+                    <m:r>
+                      <a:rPr lang="en-US" altLang="ja-JP" sz="2400" i="1" baseline="30000">
+                        <a:latin typeface="Cambria Math" panose="02040503050406030204" pitchFamily="18" charset="0"/>
+                      </a:rPr>
+                      <m:t>2</m:t>
+                    </m:r>
+                  </m:oMath>
+                </a14:m>
+                <a:r>
+                  <a:rPr lang="en-US" altLang="ja-JP" sz="2400" dirty="0"/>
+                  <a:t> </a:t>
+                </a:r>
+                <a:r>
+                  <a:rPr lang="ja-JP" altLang="en-US" sz="2000" dirty="0"/>
+                  <a:t>慣性モーメントを代入すると</a:t>
+                </a:r>
+                <a:endParaRPr lang="en-US" altLang="ja-JP" sz="2000" dirty="0"/>
+              </a:p>
+              <a:p>
+                <a14:m>
+                  <m:oMath xmlns:m="http://schemas.openxmlformats.org/officeDocument/2006/math">
+                    <m:r>
+                      <a:rPr lang="en-US" altLang="ja-JP" sz="2400" b="0" i="1" smtClean="0">
+                        <a:latin typeface="Cambria Math" panose="02040503050406030204" pitchFamily="18" charset="0"/>
+                      </a:rPr>
+                      <m:t>49=0.25</m:t>
+                    </m:r>
+                    <m:r>
+                      <a:rPr lang="en-US" altLang="ja-JP" sz="2400" i="1">
+                        <a:latin typeface="Cambria Math" panose="02040503050406030204" pitchFamily="18" charset="0"/>
+                      </a:rPr>
+                      <m:t>𝑣</m:t>
+                    </m:r>
+                    <m:r>
+                      <a:rPr lang="en-US" altLang="ja-JP" sz="2400" i="1" baseline="-25000">
+                        <a:latin typeface="Cambria Math" panose="02040503050406030204" pitchFamily="18" charset="0"/>
+                      </a:rPr>
+                      <m:t>𝑓</m:t>
+                    </m:r>
+                    <m:r>
+                      <a:rPr lang="en-US" altLang="ja-JP" sz="2400" i="1" baseline="30000">
+                        <a:latin typeface="Cambria Math" panose="02040503050406030204" pitchFamily="18" charset="0"/>
+                      </a:rPr>
+                      <m:t>2</m:t>
+                    </m:r>
+                    <m:r>
+                      <a:rPr lang="en-US" altLang="ja-JP" sz="2400" b="0" i="1" smtClean="0">
+                        <a:latin typeface="Cambria Math" panose="02040503050406030204" pitchFamily="18" charset="0"/>
+                      </a:rPr>
+                      <m:t>+</m:t>
+                    </m:r>
+                    <m:f>
+                      <m:fPr>
+                        <m:ctrlPr>
+                          <a:rPr lang="en-US" altLang="ja-JP" sz="2400" i="1">
+                            <a:latin typeface="Cambria Math" panose="02040503050406030204" pitchFamily="18" charset="0"/>
+                          </a:rPr>
+                        </m:ctrlPr>
+                      </m:fPr>
+                      <m:num>
+                        <m:r>
+                          <a:rPr lang="en-US" altLang="ja-JP" sz="2400" i="1">
+                            <a:latin typeface="Cambria Math" panose="02040503050406030204" pitchFamily="18" charset="0"/>
+                          </a:rPr>
+                          <m:t>1</m:t>
+                        </m:r>
+                      </m:num>
+                      <m:den>
+                        <m:r>
+                          <a:rPr lang="en-US" altLang="ja-JP" sz="2400" i="1">
+                            <a:latin typeface="Cambria Math" panose="02040503050406030204" pitchFamily="18" charset="0"/>
+                          </a:rPr>
+                          <m:t>2</m:t>
+                        </m:r>
+                      </m:den>
+                    </m:f>
+                    <m:r>
+                      <a:rPr lang="en-US" altLang="ja-JP" sz="2400" b="0" i="1" smtClean="0">
+                        <a:latin typeface="Cambria Math" panose="02040503050406030204" pitchFamily="18" charset="0"/>
+                      </a:rPr>
+                      <m:t>(</m:t>
+                    </m:r>
+                    <m:d>
+                      <m:dPr>
+                        <m:ctrlPr>
+                          <a:rPr lang="en-US" altLang="ja-JP" sz="2400" b="0" i="1" smtClean="0">
+                            <a:latin typeface="Cambria Math" panose="02040503050406030204" pitchFamily="18" charset="0"/>
+                          </a:rPr>
+                        </m:ctrlPr>
+                      </m:dPr>
+                      <m:e>
+                        <m:f>
+                          <m:fPr>
+                            <m:ctrlPr>
+                              <a:rPr lang="en-US" altLang="ja-JP" sz="2400" b="0" i="1" smtClean="0">
+                                <a:latin typeface="Cambria Math" panose="02040503050406030204" pitchFamily="18" charset="0"/>
+                              </a:rPr>
+                            </m:ctrlPr>
+                          </m:fPr>
+                          <m:num>
+                            <m:r>
+                              <a:rPr lang="en-US" altLang="ja-JP" sz="2400" b="0" i="1" smtClean="0">
+                                <a:latin typeface="Cambria Math" panose="02040503050406030204" pitchFamily="18" charset="0"/>
+                              </a:rPr>
+                              <m:t>2</m:t>
+                            </m:r>
+                          </m:num>
+                          <m:den>
+                            <m:r>
+                              <a:rPr lang="en-US" altLang="ja-JP" sz="2400" b="0" i="1" smtClean="0">
+                                <a:latin typeface="Cambria Math" panose="02040503050406030204" pitchFamily="18" charset="0"/>
+                              </a:rPr>
+                              <m:t>5</m:t>
+                            </m:r>
+                          </m:den>
+                        </m:f>
+                      </m:e>
+                    </m:d>
+                    <m:d>
+                      <m:dPr>
+                        <m:ctrlPr>
+                          <a:rPr lang="en-US" altLang="ja-JP" sz="2400" b="0" i="1" smtClean="0">
+                            <a:latin typeface="Cambria Math" panose="02040503050406030204" pitchFamily="18" charset="0"/>
+                          </a:rPr>
+                        </m:ctrlPr>
+                      </m:dPr>
+                      <m:e>
+                        <m:r>
+                          <a:rPr lang="en-US" altLang="ja-JP" sz="2400" b="0" i="1" smtClean="0">
+                            <a:latin typeface="Cambria Math" panose="02040503050406030204" pitchFamily="18" charset="0"/>
+                          </a:rPr>
+                          <m:t>0.5</m:t>
+                        </m:r>
+                      </m:e>
+                    </m:d>
+                    <m:r>
+                      <a:rPr lang="en-US" altLang="ja-JP" sz="2400" b="0" i="1" smtClean="0">
+                        <a:latin typeface="Cambria Math" panose="02040503050406030204" pitchFamily="18" charset="0"/>
+                      </a:rPr>
+                      <m:t>𝑟</m:t>
+                    </m:r>
+                    <m:r>
+                      <a:rPr lang="en-US" altLang="ja-JP" sz="2400" b="0" i="1" baseline="30000" smtClean="0">
+                        <a:latin typeface="Cambria Math" panose="02040503050406030204" pitchFamily="18" charset="0"/>
+                      </a:rPr>
+                      <m:t>2</m:t>
+                    </m:r>
+                    <m:r>
+                      <a:rPr lang="en-US" altLang="ja-JP" sz="2400" b="0" i="1" smtClean="0">
+                        <a:latin typeface="Cambria Math" panose="02040503050406030204" pitchFamily="18" charset="0"/>
+                      </a:rPr>
+                      <m:t>)</m:t>
+                    </m:r>
+                    <m:r>
+                      <m:rPr>
+                        <m:sty m:val="p"/>
+                      </m:rPr>
+                      <a:rPr lang="en-US" altLang="ja-JP" sz="2400" i="1">
+                        <a:latin typeface="Cambria Math" panose="02040503050406030204" pitchFamily="18" charset="0"/>
+                      </a:rPr>
+                      <m:t>ω</m:t>
+                    </m:r>
+                    <m:r>
+                      <a:rPr lang="en-US" altLang="ja-JP" sz="2400" i="1" baseline="-25000">
+                        <a:latin typeface="Cambria Math" panose="02040503050406030204" pitchFamily="18" charset="0"/>
+                      </a:rPr>
+                      <m:t>𝑓</m:t>
+                    </m:r>
+                    <m:r>
+                      <a:rPr lang="en-US" altLang="ja-JP" sz="2400" i="1" baseline="30000">
+                        <a:latin typeface="Cambria Math" panose="02040503050406030204" pitchFamily="18" charset="0"/>
+                      </a:rPr>
+                      <m:t>2</m:t>
+                    </m:r>
+                  </m:oMath>
+                </a14:m>
+                <a:r>
+                  <a:rPr lang="en-US" altLang="ja-JP" sz="2400" dirty="0"/>
+                  <a:t> </a:t>
+                </a:r>
+              </a:p>
+              <a:p>
+                <a14:m>
+                  <m:oMath xmlns:m="http://schemas.openxmlformats.org/officeDocument/2006/math">
+                    <m:r>
+                      <a:rPr lang="en-US" altLang="ja-JP" sz="2400" b="0" i="1" smtClean="0">
+                        <a:latin typeface="Cambria Math" panose="02040503050406030204" pitchFamily="18" charset="0"/>
+                      </a:rPr>
+                      <m:t>49=0.25</m:t>
+                    </m:r>
+                    <m:r>
+                      <a:rPr lang="en-US" altLang="ja-JP" sz="2400" i="1">
+                        <a:latin typeface="Cambria Math" panose="02040503050406030204" pitchFamily="18" charset="0"/>
+                      </a:rPr>
+                      <m:t>𝑣</m:t>
+                    </m:r>
+                    <m:r>
+                      <a:rPr lang="en-US" altLang="ja-JP" sz="2400" i="1" baseline="-25000">
+                        <a:latin typeface="Cambria Math" panose="02040503050406030204" pitchFamily="18" charset="0"/>
+                      </a:rPr>
+                      <m:t>𝑓</m:t>
+                    </m:r>
+                    <m:r>
+                      <a:rPr lang="en-US" altLang="ja-JP" sz="2400" i="1" baseline="30000">
+                        <a:latin typeface="Cambria Math" panose="02040503050406030204" pitchFamily="18" charset="0"/>
+                      </a:rPr>
+                      <m:t>2</m:t>
+                    </m:r>
+                    <m:r>
+                      <a:rPr lang="en-US" altLang="ja-JP" sz="2400" b="0" i="1" smtClean="0">
+                        <a:latin typeface="Cambria Math" panose="02040503050406030204" pitchFamily="18" charset="0"/>
+                      </a:rPr>
+                      <m:t>+</m:t>
+                    </m:r>
+                    <m:r>
+                      <a:rPr lang="en-US" altLang="ja-JP" sz="2400" i="1" smtClean="0">
+                        <a:latin typeface="Cambria Math" panose="02040503050406030204" pitchFamily="18" charset="0"/>
+                      </a:rPr>
+                      <m:t>0</m:t>
+                    </m:r>
+                    <m:r>
+                      <a:rPr lang="en-US" altLang="ja-JP" sz="2400" b="0" i="1" smtClean="0">
+                        <a:latin typeface="Cambria Math" panose="02040503050406030204" pitchFamily="18" charset="0"/>
+                      </a:rPr>
+                      <m:t>.1</m:t>
+                    </m:r>
+                    <m:r>
+                      <a:rPr lang="en-US" altLang="ja-JP" sz="2400" i="1">
+                        <a:latin typeface="Cambria Math" panose="02040503050406030204" pitchFamily="18" charset="0"/>
+                      </a:rPr>
+                      <m:t>𝑟</m:t>
+                    </m:r>
+                    <m:r>
+                      <a:rPr lang="en-US" altLang="ja-JP" sz="2400" i="1" baseline="30000">
+                        <a:latin typeface="Cambria Math" panose="02040503050406030204" pitchFamily="18" charset="0"/>
+                      </a:rPr>
+                      <m:t>2</m:t>
+                    </m:r>
+                    <m:r>
+                      <m:rPr>
+                        <m:sty m:val="p"/>
+                      </m:rPr>
+                      <a:rPr lang="en-US" altLang="ja-JP" sz="2400" i="1">
+                        <a:latin typeface="Cambria Math" panose="02040503050406030204" pitchFamily="18" charset="0"/>
+                      </a:rPr>
+                      <m:t>ω</m:t>
+                    </m:r>
+                    <m:r>
+                      <a:rPr lang="en-US" altLang="ja-JP" sz="2400" i="1" baseline="-25000">
+                        <a:latin typeface="Cambria Math" panose="02040503050406030204" pitchFamily="18" charset="0"/>
+                      </a:rPr>
+                      <m:t>𝑓</m:t>
+                    </m:r>
+                    <m:r>
+                      <a:rPr lang="en-US" altLang="ja-JP" sz="2400" i="1" baseline="30000">
+                        <a:latin typeface="Cambria Math" panose="02040503050406030204" pitchFamily="18" charset="0"/>
+                      </a:rPr>
+                      <m:t>2</m:t>
+                    </m:r>
+                  </m:oMath>
+                </a14:m>
+                <a:r>
+                  <a:rPr lang="en-US" altLang="ja-JP" sz="2400" dirty="0"/>
+                  <a:t> </a:t>
+                </a:r>
+              </a:p>
+              <a:p>
+                <a:r>
+                  <a:rPr lang="ja-JP" altLang="en-US" sz="2400" dirty="0"/>
+                  <a:t>次ページへ続く</a:t>
+                </a:r>
+                <a:endParaRPr lang="en-US" altLang="ja-JP" sz="2400" dirty="0"/>
+              </a:p>
+            </p:txBody>
+          </p:sp>
+        </mc:Choice>
+        <mc:Fallback>
+          <p:sp>
+            <p:nvSpPr>
+              <p:cNvPr id="6" name="テキスト ボックス 5">
+                <a:extLst>
+                  <a:ext uri="{FF2B5EF4-FFF2-40B4-BE49-F238E27FC236}">
+                    <a16:creationId xmlns:a16="http://schemas.microsoft.com/office/drawing/2014/main" id="{55830AD6-028B-4C4E-80BF-B70DFC1C3A46}"/>
+                  </a:ext>
+                </a:extLst>
+              </p:cNvPr>
+              <p:cNvSpPr txBox="1">
+                <a:spLocks noRot="1" noChangeAspect="1" noMove="1" noResize="1" noEditPoints="1" noAdjustHandles="1" noChangeArrowheads="1" noChangeShapeType="1" noTextEdit="1"/>
+              </p:cNvSpPr>
+              <p:nvPr/>
+            </p:nvSpPr>
+            <p:spPr>
+              <a:xfrm>
+                <a:off x="567542" y="1216429"/>
+                <a:ext cx="11009424" cy="5193986"/>
+              </a:xfrm>
+              <a:prstGeom prst="rect">
+                <a:avLst/>
+              </a:prstGeom>
+              <a:blipFill>
+                <a:blip r:embed="rId2"/>
+                <a:stretch>
+                  <a:fillRect l="-831" t="-939" b="-1761"/>
+                </a:stretch>
+              </a:blipFill>
+            </p:spPr>
+            <p:txBody>
+              <a:bodyPr/>
+              <a:lstStyle/>
+              <a:p>
+                <a:r>
+                  <a:rPr lang="ja-JP" altLang="en-US">
+                    <a:noFill/>
+                  </a:rPr>
+                  <a:t> </a:t>
+                </a:r>
+              </a:p>
+            </p:txBody>
+          </p:sp>
+        </mc:Fallback>
+      </mc:AlternateContent>
+    </p:spTree>
+    <p:extLst>
+      <p:ext uri="{BB962C8B-B14F-4D97-AF65-F5344CB8AC3E}">
+        <p14:creationId xmlns:p14="http://schemas.microsoft.com/office/powerpoint/2010/main" val="3723258496"/>
+      </p:ext>
+    </p:extLst>
+  </p:cSld>
+  <p:clrMapOvr>
+    <a:masterClrMapping/>
+  </p:clrMapOvr>
+</p:sld>
+</file>
+
+<file path=ppt/slides/slide8.xml><?xml version="1.0" encoding="utf-8"?>
+<p:sld xmlns:a="http://schemas.openxmlformats.org/drawingml/2006/main" xmlns:r="http://schemas.openxmlformats.org/officeDocument/2006/relationships" xmlns:p="http://schemas.openxmlformats.org/presentationml/2006/main">
+  <p:cSld>
+    <p:spTree>
+      <p:nvGrpSpPr>
+        <p:cNvPr id="1" name=""/>
+        <p:cNvGrpSpPr/>
+        <p:nvPr/>
+      </p:nvGrpSpPr>
+      <p:grpSpPr>
+        <a:xfrm>
+          <a:off x="0" y="0"/>
+          <a:ext cx="0" cy="0"/>
+          <a:chOff x="0" y="0"/>
+          <a:chExt cx="0" cy="0"/>
+        </a:xfrm>
+      </p:grpSpPr>
+      <p:sp>
+        <p:nvSpPr>
+          <p:cNvPr id="4" name="テキスト ボックス 3">
+            <a:extLst>
+              <a:ext uri="{FF2B5EF4-FFF2-40B4-BE49-F238E27FC236}">
+                <a16:creationId xmlns:a16="http://schemas.microsoft.com/office/drawing/2014/main" id="{5A13BF46-B8C5-48AA-8308-C9ECFF431A18}"/>
+              </a:ext>
+            </a:extLst>
+          </p:cNvPr>
+          <p:cNvSpPr txBox="1"/>
+          <p:nvPr/>
+        </p:nvSpPr>
+        <p:spPr>
+          <a:xfrm>
+            <a:off x="567542" y="491954"/>
+            <a:ext cx="2763898" cy="584775"/>
+          </a:xfrm>
+          <a:prstGeom prst="rect">
+            <a:avLst/>
+          </a:prstGeom>
+          <a:noFill/>
+        </p:spPr>
+        <p:txBody>
+          <a:bodyPr wrap="none" rtlCol="0">
+            <a:spAutoFit/>
+          </a:bodyPr>
+          <a:lstStyle/>
+          <a:p>
+            <a:r>
+              <a:rPr lang="ja-JP" altLang="en-US" sz="3200" b="1" u="sng" dirty="0"/>
+              <a:t>回転力学 例題</a:t>
+            </a:r>
+            <a:endParaRPr kumimoji="1" lang="en-US" altLang="ja-JP" sz="3200" b="1" u="sng" dirty="0"/>
+          </a:p>
+        </p:txBody>
+      </p:sp>
+      <mc:AlternateContent xmlns:mc="http://schemas.openxmlformats.org/markup-compatibility/2006">
+        <mc:Choice xmlns:a14="http://schemas.microsoft.com/office/drawing/2010/main" Requires="a14">
+          <p:sp>
+            <p:nvSpPr>
+              <p:cNvPr id="6" name="テキスト ボックス 5">
+                <a:extLst>
+                  <a:ext uri="{FF2B5EF4-FFF2-40B4-BE49-F238E27FC236}">
+                    <a16:creationId xmlns:a16="http://schemas.microsoft.com/office/drawing/2014/main" id="{55830AD6-028B-4C4E-80BF-B70DFC1C3A46}"/>
+                  </a:ext>
+                </a:extLst>
+              </p:cNvPr>
+              <p:cNvSpPr txBox="1"/>
+              <p:nvPr/>
+            </p:nvSpPr>
+            <p:spPr>
+              <a:xfrm>
+                <a:off x="567542" y="1216429"/>
+                <a:ext cx="8372805" cy="5667129"/>
+              </a:xfrm>
+              <a:prstGeom prst="rect">
+                <a:avLst/>
+              </a:prstGeom>
+              <a:noFill/>
+            </p:spPr>
+            <p:txBody>
+              <a:bodyPr wrap="none" rtlCol="0">
+                <a:spAutoFit/>
+              </a:bodyPr>
+              <a:lstStyle/>
+              <a:p>
+                <a:r>
+                  <a:rPr lang="ja-JP" altLang="en-US" sz="2400" dirty="0"/>
+                  <a:t>地上</a:t>
+                </a:r>
+                <a:r>
+                  <a:rPr lang="en-US" altLang="ja-JP" sz="2400" dirty="0"/>
+                  <a:t>10m</a:t>
+                </a:r>
+                <a:r>
+                  <a:rPr lang="ja-JP" altLang="en-US" sz="2400" dirty="0"/>
+                  <a:t>の高さの丘の上からボールを転がした。</a:t>
+                </a:r>
+                <a:endParaRPr lang="en-US" altLang="ja-JP" sz="2400" dirty="0"/>
+              </a:p>
+              <a:p>
+                <a:r>
+                  <a:rPr lang="ja-JP" altLang="en-US" sz="2400" dirty="0"/>
+                  <a:t>ボールの質量が</a:t>
+                </a:r>
+                <a:r>
+                  <a:rPr lang="en-US" altLang="ja-JP" sz="2400" dirty="0"/>
+                  <a:t>0.5kg</a:t>
+                </a:r>
+                <a:r>
+                  <a:rPr lang="ja-JP" altLang="en-US" sz="2400" dirty="0"/>
+                  <a:t>、慣性モーメントが</a:t>
+                </a:r>
+                <a:r>
+                  <a:rPr lang="en-US" altLang="ja-JP" sz="2400" dirty="0"/>
+                  <a:t>(2/5)mr</a:t>
+                </a:r>
+                <a:r>
+                  <a:rPr lang="en-US" altLang="ja-JP" sz="2400" baseline="30000" dirty="0"/>
+                  <a:t>2</a:t>
+                </a:r>
+                <a:r>
+                  <a:rPr lang="ja-JP" altLang="en-US" sz="2400" dirty="0"/>
+                  <a:t>のとき、</a:t>
+                </a:r>
+                <a:endParaRPr lang="en-US" altLang="ja-JP" sz="2400" dirty="0"/>
+              </a:p>
+              <a:p>
+                <a:r>
+                  <a:rPr lang="ja-JP" altLang="en-US" sz="2400" dirty="0"/>
+                  <a:t>地上</a:t>
+                </a:r>
+                <a:r>
+                  <a:rPr lang="en-US" altLang="ja-JP" sz="2400" dirty="0"/>
+                  <a:t>0m</a:t>
+                </a:r>
+                <a:r>
+                  <a:rPr lang="ja-JP" altLang="en-US" sz="2400" dirty="0"/>
+                  <a:t>地点のボールの速度を求めなさい。</a:t>
+                </a:r>
+                <a:endParaRPr lang="en-US" altLang="ja-JP" sz="2400" dirty="0"/>
+              </a:p>
+              <a:p>
+                <a:endParaRPr lang="en-US" altLang="ja-JP" sz="2400" dirty="0"/>
+              </a:p>
+              <a:p>
+                <a:r>
+                  <a:rPr lang="ja-JP" altLang="en-US" sz="2400" b="1" dirty="0">
+                    <a:solidFill>
+                      <a:srgbClr val="FF0000"/>
+                    </a:solidFill>
+                  </a:rPr>
+                  <a:t>■解答</a:t>
+                </a:r>
+                <a:endParaRPr lang="en-US" altLang="ja-JP" sz="2400" b="1" dirty="0">
+                  <a:solidFill>
+                    <a:srgbClr val="FF0000"/>
+                  </a:solidFill>
+                </a:endParaRPr>
+              </a:p>
+              <a:p>
+                <a14:m>
+                  <m:oMath xmlns:m="http://schemas.openxmlformats.org/officeDocument/2006/math">
+                    <m:r>
+                      <a:rPr lang="en-US" altLang="ja-JP" sz="2400" b="0" i="1" smtClean="0">
+                        <a:latin typeface="Cambria Math" panose="02040503050406030204" pitchFamily="18" charset="0"/>
+                      </a:rPr>
+                      <m:t>49=0.25</m:t>
+                    </m:r>
+                    <m:r>
+                      <a:rPr lang="en-US" altLang="ja-JP" sz="2400" i="1">
+                        <a:latin typeface="Cambria Math" panose="02040503050406030204" pitchFamily="18" charset="0"/>
+                      </a:rPr>
+                      <m:t>𝑣</m:t>
+                    </m:r>
+                    <m:r>
+                      <a:rPr lang="en-US" altLang="ja-JP" sz="2400" i="1" baseline="-25000">
+                        <a:latin typeface="Cambria Math" panose="02040503050406030204" pitchFamily="18" charset="0"/>
+                      </a:rPr>
+                      <m:t>𝑓</m:t>
+                    </m:r>
+                    <m:r>
+                      <a:rPr lang="en-US" altLang="ja-JP" sz="2400" i="1" baseline="30000">
+                        <a:latin typeface="Cambria Math" panose="02040503050406030204" pitchFamily="18" charset="0"/>
+                      </a:rPr>
+                      <m:t>2</m:t>
+                    </m:r>
+                    <m:r>
+                      <a:rPr lang="en-US" altLang="ja-JP" sz="2400" b="0" i="1" smtClean="0">
+                        <a:latin typeface="Cambria Math" panose="02040503050406030204" pitchFamily="18" charset="0"/>
+                      </a:rPr>
+                      <m:t>+</m:t>
+                    </m:r>
+                    <m:r>
+                      <a:rPr lang="en-US" altLang="ja-JP" sz="2400" i="1" smtClean="0">
+                        <a:latin typeface="Cambria Math" panose="02040503050406030204" pitchFamily="18" charset="0"/>
+                      </a:rPr>
+                      <m:t>0</m:t>
+                    </m:r>
+                    <m:r>
+                      <a:rPr lang="en-US" altLang="ja-JP" sz="2400" b="0" i="1" smtClean="0">
+                        <a:latin typeface="Cambria Math" panose="02040503050406030204" pitchFamily="18" charset="0"/>
+                      </a:rPr>
+                      <m:t>.1</m:t>
+                    </m:r>
+                    <m:r>
+                      <a:rPr lang="en-US" altLang="ja-JP" sz="2400" i="1" smtClean="0">
+                        <a:solidFill>
+                          <a:srgbClr val="FF0000"/>
+                        </a:solidFill>
+                        <a:latin typeface="Cambria Math" panose="02040503050406030204" pitchFamily="18" charset="0"/>
+                      </a:rPr>
+                      <m:t>𝑟</m:t>
+                    </m:r>
+                    <m:r>
+                      <a:rPr lang="en-US" altLang="ja-JP" sz="2400" i="1" baseline="30000">
+                        <a:solidFill>
+                          <a:srgbClr val="FF0000"/>
+                        </a:solidFill>
+                        <a:latin typeface="Cambria Math" panose="02040503050406030204" pitchFamily="18" charset="0"/>
+                      </a:rPr>
+                      <m:t>2</m:t>
+                    </m:r>
+                    <m:r>
+                      <m:rPr>
+                        <m:sty m:val="p"/>
+                      </m:rPr>
+                      <a:rPr lang="en-US" altLang="ja-JP" sz="2400" i="1">
+                        <a:solidFill>
+                          <a:srgbClr val="FF0000"/>
+                        </a:solidFill>
+                        <a:latin typeface="Cambria Math" panose="02040503050406030204" pitchFamily="18" charset="0"/>
+                      </a:rPr>
+                      <m:t>ω</m:t>
+                    </m:r>
+                    <m:r>
+                      <a:rPr lang="en-US" altLang="ja-JP" sz="2400" i="1" baseline="-25000">
+                        <a:solidFill>
+                          <a:srgbClr val="FF0000"/>
+                        </a:solidFill>
+                        <a:latin typeface="Cambria Math" panose="02040503050406030204" pitchFamily="18" charset="0"/>
+                      </a:rPr>
+                      <m:t>𝑓</m:t>
+                    </m:r>
+                    <m:r>
+                      <a:rPr lang="en-US" altLang="ja-JP" sz="2400" i="1" baseline="30000">
+                        <a:solidFill>
+                          <a:srgbClr val="FF0000"/>
+                        </a:solidFill>
+                        <a:latin typeface="Cambria Math" panose="02040503050406030204" pitchFamily="18" charset="0"/>
+                      </a:rPr>
+                      <m:t>2</m:t>
+                    </m:r>
+                  </m:oMath>
+                </a14:m>
+                <a:r>
+                  <a:rPr lang="en-US" altLang="ja-JP" sz="2400" dirty="0">
+                    <a:solidFill>
+                      <a:srgbClr val="FF0000"/>
+                    </a:solidFill>
+                  </a:rPr>
+                  <a:t> </a:t>
+                </a:r>
+                <a:endParaRPr lang="en-US" altLang="ja-JP" sz="2400" dirty="0"/>
+              </a:p>
+              <a:p>
+                <a14:m>
+                  <m:oMath xmlns:m="http://schemas.openxmlformats.org/officeDocument/2006/math">
+                    <m:r>
+                      <a:rPr lang="en-US" altLang="ja-JP" sz="2400" b="0" i="1" smtClean="0">
+                        <a:latin typeface="Cambria Math" panose="02040503050406030204" pitchFamily="18" charset="0"/>
+                      </a:rPr>
+                      <m:t>𝑣</m:t>
+                    </m:r>
+                    <m:r>
+                      <a:rPr lang="en-US" altLang="ja-JP" sz="2400" b="0" i="1" smtClean="0">
+                        <a:latin typeface="Cambria Math" panose="02040503050406030204" pitchFamily="18" charset="0"/>
+                      </a:rPr>
+                      <m:t>=</m:t>
+                    </m:r>
+                    <m:r>
+                      <a:rPr lang="en-US" altLang="ja-JP" sz="2400" b="0" i="1" smtClean="0">
+                        <a:latin typeface="Cambria Math" panose="02040503050406030204" pitchFamily="18" charset="0"/>
+                      </a:rPr>
+                      <m:t>𝑟</m:t>
+                    </m:r>
+                    <m:r>
+                      <m:rPr>
+                        <m:sty m:val="p"/>
+                      </m:rPr>
+                      <a:rPr lang="en-US" altLang="ja-JP" sz="2400" i="1">
+                        <a:latin typeface="Cambria Math" panose="02040503050406030204" pitchFamily="18" charset="0"/>
+                      </a:rPr>
+                      <m:t>ω</m:t>
+                    </m:r>
+                  </m:oMath>
+                </a14:m>
+                <a:r>
+                  <a:rPr lang="ja-JP" altLang="en-US" sz="2400" dirty="0"/>
+                  <a:t> より </a:t>
+                </a:r>
+                <a14:m>
+                  <m:oMath xmlns:m="http://schemas.openxmlformats.org/officeDocument/2006/math">
+                    <m:r>
+                      <a:rPr lang="en-US" altLang="ja-JP" sz="2400" i="1">
+                        <a:latin typeface="Cambria Math" panose="02040503050406030204" pitchFamily="18" charset="0"/>
+                      </a:rPr>
+                      <m:t>𝑣</m:t>
+                    </m:r>
+                    <m:r>
+                      <a:rPr lang="en-US" altLang="ja-JP" sz="2400" b="0" i="1" baseline="-25000" smtClean="0">
+                        <a:latin typeface="Cambria Math" panose="02040503050406030204" pitchFamily="18" charset="0"/>
+                      </a:rPr>
+                      <m:t>𝑓</m:t>
+                    </m:r>
+                    <m:r>
+                      <a:rPr lang="en-US" altLang="ja-JP" sz="2400" b="0" i="1" baseline="30000" smtClean="0">
+                        <a:latin typeface="Cambria Math" panose="02040503050406030204" pitchFamily="18" charset="0"/>
+                      </a:rPr>
+                      <m:t>2</m:t>
+                    </m:r>
+                    <m:r>
+                      <a:rPr lang="en-US" altLang="ja-JP" sz="2400" i="1">
+                        <a:latin typeface="Cambria Math" panose="02040503050406030204" pitchFamily="18" charset="0"/>
+                      </a:rPr>
+                      <m:t>=</m:t>
+                    </m:r>
+                    <m:r>
+                      <a:rPr lang="en-US" altLang="ja-JP" sz="2400" i="1">
+                        <a:latin typeface="Cambria Math" panose="02040503050406030204" pitchFamily="18" charset="0"/>
+                      </a:rPr>
+                      <m:t>𝑟</m:t>
+                    </m:r>
+                    <m:r>
+                      <a:rPr lang="en-US" altLang="ja-JP" sz="2400" i="1" baseline="30000">
+                        <a:latin typeface="Cambria Math" panose="02040503050406030204" pitchFamily="18" charset="0"/>
+                      </a:rPr>
+                      <m:t>2</m:t>
+                    </m:r>
+                    <m:r>
+                      <m:rPr>
+                        <m:sty m:val="p"/>
+                      </m:rPr>
+                      <a:rPr lang="en-US" altLang="ja-JP" sz="2400" i="1">
+                        <a:latin typeface="Cambria Math" panose="02040503050406030204" pitchFamily="18" charset="0"/>
+                      </a:rPr>
+                      <m:t>ω</m:t>
+                    </m:r>
+                    <m:r>
+                      <a:rPr lang="en-US" altLang="ja-JP" sz="2400" i="1" baseline="-25000">
+                        <a:latin typeface="Cambria Math" panose="02040503050406030204" pitchFamily="18" charset="0"/>
+                      </a:rPr>
+                      <m:t>𝑓</m:t>
+                    </m:r>
+                    <m:r>
+                      <a:rPr lang="en-US" altLang="ja-JP" sz="2400" i="1" baseline="30000">
+                        <a:latin typeface="Cambria Math" panose="02040503050406030204" pitchFamily="18" charset="0"/>
+                      </a:rPr>
+                      <m:t>2</m:t>
+                    </m:r>
+                  </m:oMath>
+                </a14:m>
+                <a:r>
+                  <a:rPr lang="en-US" altLang="ja-JP" sz="2400" dirty="0"/>
+                  <a:t> </a:t>
+                </a:r>
+                <a:r>
+                  <a:rPr lang="ja-JP" altLang="en-US" sz="2400" dirty="0"/>
+                  <a:t>が成り立つため、</a:t>
+                </a:r>
+                <a:endParaRPr lang="en-US" altLang="ja-JP" sz="2400" dirty="0"/>
+              </a:p>
+              <a:p>
+                <a14:m>
+                  <m:oMath xmlns:m="http://schemas.openxmlformats.org/officeDocument/2006/math">
+                    <m:r>
+                      <a:rPr lang="en-US" altLang="ja-JP" sz="2400" b="0" i="1" smtClean="0">
+                        <a:latin typeface="Cambria Math" panose="02040503050406030204" pitchFamily="18" charset="0"/>
+                      </a:rPr>
+                      <m:t>49=0.25</m:t>
+                    </m:r>
+                    <m:r>
+                      <a:rPr lang="en-US" altLang="ja-JP" sz="2400" i="1">
+                        <a:latin typeface="Cambria Math" panose="02040503050406030204" pitchFamily="18" charset="0"/>
+                      </a:rPr>
+                      <m:t>𝑣</m:t>
+                    </m:r>
+                    <m:r>
+                      <a:rPr lang="en-US" altLang="ja-JP" sz="2400" i="1" baseline="-25000">
+                        <a:latin typeface="Cambria Math" panose="02040503050406030204" pitchFamily="18" charset="0"/>
+                      </a:rPr>
+                      <m:t>𝑓</m:t>
+                    </m:r>
+                    <m:r>
+                      <a:rPr lang="en-US" altLang="ja-JP" sz="2400" i="1" baseline="30000">
+                        <a:latin typeface="Cambria Math" panose="02040503050406030204" pitchFamily="18" charset="0"/>
+                      </a:rPr>
+                      <m:t>2</m:t>
+                    </m:r>
+                    <m:r>
+                      <a:rPr lang="en-US" altLang="ja-JP" sz="2400" b="0" i="1" smtClean="0">
+                        <a:latin typeface="Cambria Math" panose="02040503050406030204" pitchFamily="18" charset="0"/>
+                      </a:rPr>
+                      <m:t>+</m:t>
+                    </m:r>
+                    <m:r>
+                      <a:rPr lang="en-US" altLang="ja-JP" sz="2400" i="1" smtClean="0">
+                        <a:latin typeface="Cambria Math" panose="02040503050406030204" pitchFamily="18" charset="0"/>
+                      </a:rPr>
+                      <m:t>0</m:t>
+                    </m:r>
+                    <m:r>
+                      <a:rPr lang="en-US" altLang="ja-JP" sz="2400" b="0" i="1" smtClean="0">
+                        <a:latin typeface="Cambria Math" panose="02040503050406030204" pitchFamily="18" charset="0"/>
+                      </a:rPr>
+                      <m:t>.1</m:t>
+                    </m:r>
+                    <m:r>
+                      <a:rPr lang="en-US" altLang="ja-JP" sz="2400" b="0" i="1" smtClean="0">
+                        <a:solidFill>
+                          <a:srgbClr val="FF0000"/>
+                        </a:solidFill>
+                        <a:latin typeface="Cambria Math" panose="02040503050406030204" pitchFamily="18" charset="0"/>
+                      </a:rPr>
+                      <m:t>𝑣</m:t>
+                    </m:r>
+                    <m:r>
+                      <a:rPr lang="en-US" altLang="ja-JP" sz="2400" i="1" baseline="-25000">
+                        <a:solidFill>
+                          <a:srgbClr val="FF0000"/>
+                        </a:solidFill>
+                        <a:latin typeface="Cambria Math" panose="02040503050406030204" pitchFamily="18" charset="0"/>
+                      </a:rPr>
+                      <m:t>𝑓</m:t>
+                    </m:r>
+                    <m:r>
+                      <a:rPr lang="en-US" altLang="ja-JP" sz="2400" i="1" baseline="30000">
+                        <a:solidFill>
+                          <a:srgbClr val="FF0000"/>
+                        </a:solidFill>
+                        <a:latin typeface="Cambria Math" panose="02040503050406030204" pitchFamily="18" charset="0"/>
+                      </a:rPr>
+                      <m:t>2</m:t>
+                    </m:r>
+                  </m:oMath>
+                </a14:m>
+                <a:r>
+                  <a:rPr lang="en-US" altLang="ja-JP" sz="2400" dirty="0">
+                    <a:solidFill>
+                      <a:srgbClr val="FF0000"/>
+                    </a:solidFill>
+                  </a:rPr>
+                  <a:t> </a:t>
+                </a:r>
+                <a:endParaRPr lang="en-US" altLang="ja-JP" sz="2400" dirty="0"/>
+              </a:p>
+              <a:p>
+                <a14:m>
+                  <m:oMath xmlns:m="http://schemas.openxmlformats.org/officeDocument/2006/math">
+                    <m:r>
+                      <a:rPr lang="en-US" altLang="ja-JP" sz="2400" b="0" i="1" smtClean="0">
+                        <a:latin typeface="Cambria Math" panose="02040503050406030204" pitchFamily="18" charset="0"/>
+                      </a:rPr>
+                      <m:t>49=0.35</m:t>
+                    </m:r>
+                    <m:r>
+                      <a:rPr lang="en-US" altLang="ja-JP" sz="2400" i="1">
+                        <a:latin typeface="Cambria Math" panose="02040503050406030204" pitchFamily="18" charset="0"/>
+                      </a:rPr>
+                      <m:t>𝑣</m:t>
+                    </m:r>
+                    <m:r>
+                      <a:rPr lang="en-US" altLang="ja-JP" sz="2400" i="1" baseline="-25000">
+                        <a:latin typeface="Cambria Math" panose="02040503050406030204" pitchFamily="18" charset="0"/>
+                      </a:rPr>
+                      <m:t>𝑓</m:t>
+                    </m:r>
+                    <m:r>
+                      <a:rPr lang="en-US" altLang="ja-JP" sz="2400" i="1" baseline="30000">
+                        <a:latin typeface="Cambria Math" panose="02040503050406030204" pitchFamily="18" charset="0"/>
+                      </a:rPr>
+                      <m:t>2</m:t>
+                    </m:r>
+                  </m:oMath>
+                </a14:m>
+                <a:r>
+                  <a:rPr lang="en-US" altLang="ja-JP" sz="2400" dirty="0"/>
+                  <a:t> </a:t>
+                </a:r>
+              </a:p>
+              <a:p>
+                <a14:m>
+                  <m:oMath xmlns:m="http://schemas.openxmlformats.org/officeDocument/2006/math">
+                    <m:r>
+                      <a:rPr lang="en-US" altLang="ja-JP" sz="2400" b="0" i="1" smtClean="0">
+                        <a:latin typeface="Cambria Math" panose="02040503050406030204" pitchFamily="18" charset="0"/>
+                      </a:rPr>
+                      <m:t>140=</m:t>
+                    </m:r>
+                    <m:r>
+                      <a:rPr lang="en-US" altLang="ja-JP" sz="2400" i="1">
+                        <a:latin typeface="Cambria Math" panose="02040503050406030204" pitchFamily="18" charset="0"/>
+                      </a:rPr>
+                      <m:t>𝑣</m:t>
+                    </m:r>
+                    <m:r>
+                      <a:rPr lang="en-US" altLang="ja-JP" sz="2400" i="1" baseline="-25000">
+                        <a:latin typeface="Cambria Math" panose="02040503050406030204" pitchFamily="18" charset="0"/>
+                      </a:rPr>
+                      <m:t>𝑓</m:t>
+                    </m:r>
+                    <m:r>
+                      <a:rPr lang="en-US" altLang="ja-JP" sz="2400" i="1" baseline="30000">
+                        <a:latin typeface="Cambria Math" panose="02040503050406030204" pitchFamily="18" charset="0"/>
+                      </a:rPr>
+                      <m:t>2</m:t>
+                    </m:r>
+                  </m:oMath>
+                </a14:m>
+                <a:r>
+                  <a:rPr lang="en-US" altLang="ja-JP" sz="2400" dirty="0"/>
+                  <a:t> </a:t>
+                </a:r>
+              </a:p>
+              <a:p>
+                <a14:m>
+                  <m:oMath xmlns:m="http://schemas.openxmlformats.org/officeDocument/2006/math">
+                    <m:r>
+                      <a:rPr lang="en-US" altLang="ja-JP" sz="2400" i="1">
+                        <a:latin typeface="Cambria Math" panose="02040503050406030204" pitchFamily="18" charset="0"/>
+                      </a:rPr>
+                      <m:t>𝑣</m:t>
+                    </m:r>
+                    <m:r>
+                      <a:rPr lang="en-US" altLang="ja-JP" sz="2400" i="1" baseline="-25000">
+                        <a:latin typeface="Cambria Math" panose="02040503050406030204" pitchFamily="18" charset="0"/>
+                      </a:rPr>
+                      <m:t>𝑓</m:t>
+                    </m:r>
+                    <m:r>
+                      <a:rPr lang="en-US" altLang="ja-JP" sz="2400" i="1">
+                        <a:latin typeface="Cambria Math" panose="02040503050406030204" pitchFamily="18" charset="0"/>
+                      </a:rPr>
+                      <m:t>=</m:t>
+                    </m:r>
+                    <m:rad>
+                      <m:radPr>
+                        <m:degHide m:val="on"/>
+                        <m:ctrlPr>
+                          <a:rPr lang="en-US" altLang="ja-JP" sz="2400" i="1" smtClean="0">
+                            <a:solidFill>
+                              <a:srgbClr val="FF0000"/>
+                            </a:solidFill>
+                            <a:latin typeface="Cambria Math" panose="02040503050406030204" pitchFamily="18" charset="0"/>
+                          </a:rPr>
+                        </m:ctrlPr>
+                      </m:radPr>
+                      <m:deg/>
+                      <m:e>
+                        <m:r>
+                          <a:rPr lang="en-US" altLang="ja-JP" sz="2400" i="1">
+                            <a:solidFill>
+                              <a:srgbClr val="FF0000"/>
+                            </a:solidFill>
+                            <a:latin typeface="Cambria Math" panose="02040503050406030204" pitchFamily="18" charset="0"/>
+                          </a:rPr>
+                          <m:t>140</m:t>
+                        </m:r>
+                      </m:e>
+                    </m:rad>
+                    <m:r>
+                      <a:rPr lang="en-US" altLang="ja-JP" sz="2400" b="0" i="1" smtClean="0">
+                        <a:solidFill>
+                          <a:srgbClr val="FF0000"/>
+                        </a:solidFill>
+                        <a:latin typeface="Cambria Math" panose="02040503050406030204" pitchFamily="18" charset="0"/>
+                      </a:rPr>
+                      <m:t>𝑚</m:t>
+                    </m:r>
+                    <m:r>
+                      <a:rPr lang="en-US" altLang="ja-JP" sz="2400" b="0" i="1" smtClean="0">
+                        <a:solidFill>
+                          <a:srgbClr val="FF0000"/>
+                        </a:solidFill>
+                        <a:latin typeface="Cambria Math" panose="02040503050406030204" pitchFamily="18" charset="0"/>
+                      </a:rPr>
+                      <m:t>/</m:t>
+                    </m:r>
+                    <m:r>
+                      <a:rPr lang="ja-JP" altLang="en-US" sz="2400" i="1">
+                        <a:solidFill>
+                          <a:srgbClr val="FF0000"/>
+                        </a:solidFill>
+                        <a:latin typeface="Cambria Math" panose="02040503050406030204" pitchFamily="18" charset="0"/>
+                      </a:rPr>
+                      <m:t>秒</m:t>
+                    </m:r>
+                  </m:oMath>
+                </a14:m>
+                <a:r>
+                  <a:rPr lang="en-US" altLang="ja-JP" sz="2400" dirty="0"/>
+                  <a:t> </a:t>
+                </a:r>
+              </a:p>
+              <a:p>
+                <a:endParaRPr lang="en-US" altLang="ja-JP" sz="2400" dirty="0"/>
+              </a:p>
+              <a:p>
+                <a:r>
+                  <a:rPr lang="ja-JP" altLang="en-US" sz="2400" dirty="0"/>
+                  <a:t>おおよそ</a:t>
+                </a:r>
+                <a:r>
+                  <a:rPr lang="en-US" altLang="ja-JP" sz="2400" dirty="0"/>
+                  <a:t>11.8m/</a:t>
+                </a:r>
+                <a:r>
+                  <a:rPr lang="ja-JP" altLang="en-US" sz="2400" dirty="0"/>
+                  <a:t>秒となります。</a:t>
+                </a:r>
+                <a:endParaRPr lang="en-US" altLang="ja-JP" sz="2400" dirty="0"/>
+              </a:p>
+              <a:p>
+                <a:r>
+                  <a:rPr lang="ja-JP" altLang="en-US" sz="2400" dirty="0"/>
+                  <a:t>ちなみに回転運動がなければ</a:t>
+                </a:r>
+                <a:r>
+                  <a:rPr lang="en-US" altLang="ja-JP" sz="2400" dirty="0"/>
+                  <a:t>14m/</a:t>
+                </a:r>
+                <a:r>
+                  <a:rPr lang="ja-JP" altLang="en-US" sz="2400" dirty="0"/>
+                  <a:t>秒となり、</a:t>
+                </a:r>
+                <a:endParaRPr lang="en-US" altLang="ja-JP" sz="2400" dirty="0"/>
+              </a:p>
+              <a:p>
+                <a:r>
+                  <a:rPr lang="ja-JP" altLang="en-US" sz="2400" dirty="0"/>
+                  <a:t>回転により速度が落ちていることが分かります。</a:t>
+                </a:r>
+                <a:endParaRPr lang="en-US" altLang="ja-JP" sz="2400" dirty="0"/>
+              </a:p>
+            </p:txBody>
+          </p:sp>
+        </mc:Choice>
+        <mc:Fallback>
+          <p:sp>
+            <p:nvSpPr>
+              <p:cNvPr id="6" name="テキスト ボックス 5">
+                <a:extLst>
+                  <a:ext uri="{FF2B5EF4-FFF2-40B4-BE49-F238E27FC236}">
+                    <a16:creationId xmlns:a16="http://schemas.microsoft.com/office/drawing/2014/main" id="{55830AD6-028B-4C4E-80BF-B70DFC1C3A46}"/>
+                  </a:ext>
+                </a:extLst>
+              </p:cNvPr>
+              <p:cNvSpPr txBox="1">
+                <a:spLocks noRot="1" noChangeAspect="1" noMove="1" noResize="1" noEditPoints="1" noAdjustHandles="1" noChangeArrowheads="1" noChangeShapeType="1" noTextEdit="1"/>
+              </p:cNvSpPr>
+              <p:nvPr/>
+            </p:nvSpPr>
+            <p:spPr>
+              <a:xfrm>
+                <a:off x="567542" y="1216429"/>
+                <a:ext cx="8372805" cy="5667129"/>
+              </a:xfrm>
+              <a:prstGeom prst="rect">
+                <a:avLst/>
+              </a:prstGeom>
+              <a:blipFill>
+                <a:blip r:embed="rId2"/>
+                <a:stretch>
+                  <a:fillRect l="-1092" t="-861" b="-1615"/>
+                </a:stretch>
+              </a:blipFill>
+            </p:spPr>
+            <p:txBody>
+              <a:bodyPr/>
+              <a:lstStyle/>
+              <a:p>
+                <a:r>
+                  <a:rPr lang="ja-JP" altLang="en-US">
+                    <a:noFill/>
+                  </a:rPr>
+                  <a:t> </a:t>
+                </a:r>
+              </a:p>
+            </p:txBody>
+          </p:sp>
+        </mc:Fallback>
+      </mc:AlternateContent>
+    </p:spTree>
+    <p:extLst>
+      <p:ext uri="{BB962C8B-B14F-4D97-AF65-F5344CB8AC3E}">
+        <p14:creationId xmlns:p14="http://schemas.microsoft.com/office/powerpoint/2010/main" val="970535782"/>
+      </p:ext>
+    </p:extLst>
+  </p:cSld>
+  <p:clrMapOvr>
+    <a:masterClrMapping/>
+  </p:clrMapOvr>
+</p:sld>
+</file>
+
+<file path=ppt/slides/slide9.xml><?xml version="1.0" encoding="utf-8"?>
+<p:sld xmlns:a="http://schemas.openxmlformats.org/drawingml/2006/main" xmlns:r="http://schemas.openxmlformats.org/officeDocument/2006/relationships" xmlns:p="http://schemas.openxmlformats.org/presentationml/2006/main">
+  <p:cSld>
+    <p:spTree>
+      <p:nvGrpSpPr>
+        <p:cNvPr id="1" name=""/>
+        <p:cNvGrpSpPr/>
+        <p:nvPr/>
+      </p:nvGrpSpPr>
+      <p:grpSpPr>
+        <a:xfrm>
+          <a:off x="0" y="0"/>
+          <a:ext cx="0" cy="0"/>
+          <a:chOff x="0" y="0"/>
+          <a:chExt cx="0" cy="0"/>
+        </a:xfrm>
+      </p:grpSpPr>
+      <p:sp>
+        <p:nvSpPr>
+          <p:cNvPr id="4" name="テキスト ボックス 3">
+            <a:extLst>
+              <a:ext uri="{FF2B5EF4-FFF2-40B4-BE49-F238E27FC236}">
+                <a16:creationId xmlns:a16="http://schemas.microsoft.com/office/drawing/2014/main" id="{5A13BF46-B8C5-48AA-8308-C9ECFF431A18}"/>
+              </a:ext>
+            </a:extLst>
+          </p:cNvPr>
+          <p:cNvSpPr txBox="1"/>
+          <p:nvPr/>
+        </p:nvSpPr>
+        <p:spPr>
+          <a:xfrm>
+            <a:off x="567542" y="491954"/>
+            <a:ext cx="2763898" cy="584775"/>
+          </a:xfrm>
+          <a:prstGeom prst="rect">
+            <a:avLst/>
+          </a:prstGeom>
+          <a:noFill/>
+        </p:spPr>
+        <p:txBody>
+          <a:bodyPr wrap="none" rtlCol="0">
+            <a:spAutoFit/>
+          </a:bodyPr>
+          <a:lstStyle/>
+          <a:p>
+            <a:r>
+              <a:rPr lang="ja-JP" altLang="en-US" sz="3200" b="1" u="sng" dirty="0"/>
+              <a:t>回転力学 練習</a:t>
+            </a:r>
+            <a:endParaRPr kumimoji="1" lang="en-US" altLang="ja-JP" sz="3200" b="1" u="sng" dirty="0"/>
+          </a:p>
+        </p:txBody>
+      </p:sp>
+      <p:sp>
+        <p:nvSpPr>
+          <p:cNvPr id="6" name="テキスト ボックス 5">
+            <a:extLst>
+              <a:ext uri="{FF2B5EF4-FFF2-40B4-BE49-F238E27FC236}">
+                <a16:creationId xmlns:a16="http://schemas.microsoft.com/office/drawing/2014/main" id="{55830AD6-028B-4C4E-80BF-B70DFC1C3A46}"/>
+              </a:ext>
+            </a:extLst>
+          </p:cNvPr>
+          <p:cNvSpPr txBox="1"/>
+          <p:nvPr/>
+        </p:nvSpPr>
+        <p:spPr>
+          <a:xfrm>
+            <a:off x="567542" y="1216429"/>
+            <a:ext cx="10237098" cy="4154984"/>
+          </a:xfrm>
+          <a:prstGeom prst="rect">
+            <a:avLst/>
+          </a:prstGeom>
+          <a:noFill/>
+        </p:spPr>
+        <p:txBody>
+          <a:bodyPr wrap="none" rtlCol="0">
+            <a:spAutoFit/>
+          </a:bodyPr>
+          <a:lstStyle/>
+          <a:p>
+            <a:r>
+              <a:rPr lang="ja-JP" altLang="en-US" sz="2400" dirty="0"/>
+              <a:t>① 半径</a:t>
+            </a:r>
+            <a:r>
+              <a:rPr lang="en-US" altLang="ja-JP" sz="2400" dirty="0"/>
+              <a:t>0.3m</a:t>
+            </a:r>
+            <a:r>
+              <a:rPr lang="ja-JP" altLang="en-US" sz="2400" dirty="0"/>
+              <a:t>、質量</a:t>
+            </a:r>
+            <a:r>
+              <a:rPr lang="en-US" altLang="ja-JP" sz="2400" dirty="0"/>
+              <a:t>1.2kg</a:t>
+            </a:r>
+            <a:r>
+              <a:rPr lang="ja-JP" altLang="en-US" sz="2400" dirty="0"/>
+              <a:t>のルーレットを手で回しました。</a:t>
+            </a:r>
+            <a:endParaRPr lang="en-US" altLang="ja-JP" sz="2400" dirty="0"/>
+          </a:p>
+          <a:p>
+            <a:r>
+              <a:rPr lang="ja-JP" altLang="en-US" sz="2400" dirty="0"/>
+              <a:t>　 ルーレットは角加速度</a:t>
+            </a:r>
+            <a:r>
+              <a:rPr lang="en-US" altLang="ja-JP" sz="2400" dirty="0"/>
+              <a:t>2.5rad/</a:t>
+            </a:r>
+            <a:r>
+              <a:rPr lang="ja-JP" altLang="en-US" sz="2400" dirty="0"/>
+              <a:t>秒</a:t>
+            </a:r>
+            <a:r>
+              <a:rPr lang="ja-JP" altLang="en-US" sz="2400" baseline="30000" dirty="0"/>
+              <a:t>２</a:t>
+            </a:r>
+            <a:r>
+              <a:rPr lang="ja-JP" altLang="en-US" sz="2400" dirty="0"/>
+              <a:t>で回転を始めました。</a:t>
+            </a:r>
+            <a:endParaRPr lang="en-US" altLang="ja-JP" sz="2400" dirty="0"/>
+          </a:p>
+          <a:p>
+            <a:r>
+              <a:rPr lang="ja-JP" altLang="en-US" sz="2400" dirty="0"/>
+              <a:t>　 慣性半径係数が</a:t>
+            </a:r>
+            <a:r>
+              <a:rPr lang="en-US" altLang="ja-JP" sz="2400" dirty="0"/>
+              <a:t>0.5</a:t>
+            </a:r>
+            <a:r>
+              <a:rPr lang="ja-JP" altLang="en-US" sz="2400" dirty="0"/>
+              <a:t>の場合、手で与えた回転モーメントを求めなさい。</a:t>
+            </a:r>
+            <a:endParaRPr lang="en-US" altLang="ja-JP" sz="2400" dirty="0"/>
+          </a:p>
+          <a:p>
+            <a:endParaRPr lang="en-US" altLang="ja-JP" sz="2400" dirty="0"/>
+          </a:p>
+          <a:p>
+            <a:r>
+              <a:rPr lang="ja-JP" altLang="en-US" sz="2400" dirty="0"/>
+              <a:t>② 停車している車に別の車が衝突しました。</a:t>
+            </a:r>
+            <a:endParaRPr lang="en-US" altLang="ja-JP" sz="2400" dirty="0"/>
+          </a:p>
+          <a:p>
+            <a:r>
+              <a:rPr lang="ja-JP" altLang="en-US" sz="2400" dirty="0"/>
+              <a:t>　 衝突された車は</a:t>
+            </a:r>
+            <a:r>
+              <a:rPr lang="en-US" altLang="ja-JP" sz="2400" dirty="0"/>
+              <a:t>3000N*m</a:t>
+            </a:r>
+            <a:r>
+              <a:rPr lang="ja-JP" altLang="en-US" sz="2400" dirty="0"/>
+              <a:t>の回転モーメントが加わり回転します。</a:t>
+            </a:r>
+            <a:endParaRPr lang="en-US" altLang="ja-JP" sz="2400" dirty="0"/>
+          </a:p>
+          <a:p>
+            <a:r>
+              <a:rPr lang="ja-JP" altLang="en-US" sz="2400" dirty="0"/>
+              <a:t>　 衝突された車の慣性モーメントが</a:t>
+            </a:r>
+            <a:r>
+              <a:rPr lang="en-US" altLang="ja-JP" sz="2400" dirty="0"/>
+              <a:t>4000kgm</a:t>
+            </a:r>
+            <a:r>
+              <a:rPr lang="en-US" altLang="ja-JP" sz="2400" baseline="30000" dirty="0"/>
+              <a:t>2</a:t>
+            </a:r>
+            <a:r>
+              <a:rPr lang="ja-JP" altLang="en-US" sz="2400" dirty="0"/>
+              <a:t>の場合、</a:t>
+            </a:r>
+            <a:endParaRPr lang="en-US" altLang="ja-JP" sz="2400" dirty="0"/>
+          </a:p>
+          <a:p>
+            <a:r>
+              <a:rPr lang="ja-JP" altLang="en-US" sz="2400" dirty="0"/>
+              <a:t>　 衝突時の角加速度を求めなさい。</a:t>
+            </a:r>
+            <a:endParaRPr lang="en-US" altLang="ja-JP" sz="2400" dirty="0"/>
+          </a:p>
+          <a:p>
+            <a:endParaRPr lang="en-US" altLang="ja-JP" sz="2400" dirty="0"/>
+          </a:p>
+          <a:p>
+            <a:r>
+              <a:rPr lang="ja-JP" altLang="en-US" sz="2400" dirty="0"/>
+              <a:t>③ 半径</a:t>
+            </a:r>
+            <a:r>
+              <a:rPr lang="en-US" altLang="ja-JP" sz="2400" dirty="0"/>
+              <a:t>0.1m</a:t>
+            </a:r>
+            <a:r>
+              <a:rPr lang="ja-JP" altLang="en-US" sz="2400" dirty="0"/>
+              <a:t>、質量が</a:t>
+            </a:r>
+            <a:r>
+              <a:rPr lang="en-US" altLang="ja-JP" sz="2400" dirty="0"/>
+              <a:t>2kg</a:t>
+            </a:r>
+            <a:r>
+              <a:rPr lang="ja-JP" altLang="en-US" sz="2400" dirty="0"/>
+              <a:t>のボールが高さ</a:t>
+            </a:r>
+            <a:r>
+              <a:rPr lang="en-US" altLang="ja-JP" sz="2400" dirty="0"/>
+              <a:t>5</a:t>
+            </a:r>
+            <a:r>
+              <a:rPr lang="ja-JP" altLang="en-US" sz="2400" dirty="0"/>
+              <a:t>ｍの丘から転がり落ちた。</a:t>
+            </a:r>
+            <a:endParaRPr lang="en-US" altLang="ja-JP" sz="2400" dirty="0"/>
+          </a:p>
+          <a:p>
+            <a:r>
+              <a:rPr lang="ja-JP" altLang="en-US" sz="2400" dirty="0"/>
+              <a:t>　 地面（高さ</a:t>
+            </a:r>
+            <a:r>
+              <a:rPr lang="en-US" altLang="ja-JP" sz="2400" dirty="0"/>
+              <a:t>0</a:t>
+            </a:r>
+            <a:r>
+              <a:rPr lang="ja-JP" altLang="en-US" sz="2400" dirty="0"/>
+              <a:t>ｍ）に着いた時のボールの速度を求めなさい。</a:t>
+            </a:r>
+            <a:endParaRPr lang="en-US" altLang="ja-JP" sz="2400" dirty="0"/>
+          </a:p>
+        </p:txBody>
+      </p:sp>
+    </p:spTree>
+    <p:extLst>
+      <p:ext uri="{BB962C8B-B14F-4D97-AF65-F5344CB8AC3E}">
+        <p14:creationId xmlns:p14="http://schemas.microsoft.com/office/powerpoint/2010/main" val="1867613416"/>
       </p:ext>
     </p:extLst>
   </p:cSld>

--- a/ゲーム科2年/00_前期/ゲーム開発Ⅲ/ゲーム物理学/座学/29_回転力学.pptx
+++ b/ゲーム科2年/00_前期/ゲーム開発Ⅲ/ゲーム物理学/座学/29_回転力学.pptx
@@ -3952,8 +3952,8 @@
           </a:p>
         </p:txBody>
       </p:sp>
-      <mc:AlternateContent xmlns:mc="http://schemas.openxmlformats.org/markup-compatibility/2006">
-        <mc:Choice xmlns:a14="http://schemas.microsoft.com/office/drawing/2010/main" Requires="a14">
+      <mc:AlternateContent xmlns:mc="http://schemas.openxmlformats.org/markup-compatibility/2006" xmlns:a14="http://schemas.microsoft.com/office/drawing/2010/main">
+        <mc:Choice Requires="a14">
           <p:sp>
             <p:nvSpPr>
               <p:cNvPr id="6" name="テキスト ボックス 5">
@@ -4025,13 +4025,7 @@
                       <a:rPr lang="en-US" altLang="ja-JP" sz="2400" b="0" i="1" dirty="0" smtClean="0">
                         <a:latin typeface="Cambria Math" panose="02040503050406030204" pitchFamily="18" charset="0"/>
                       </a:rPr>
-                      <m:t>𝑘</m:t>
-                    </m:r>
-                    <m:r>
-                      <a:rPr lang="en-US" altLang="ja-JP" sz="2400" b="0" i="1" dirty="0" smtClean="0">
-                        <a:latin typeface="Cambria Math" panose="02040503050406030204" pitchFamily="18" charset="0"/>
-                      </a:rPr>
-                      <m:t>𝑚</m:t>
+                      <m:t>𝑘𝑚</m:t>
                     </m:r>
                     <m:sSup>
                       <m:sSupPr>
@@ -4179,7 +4173,7 @@
             </p:txBody>
           </p:sp>
         </mc:Choice>
-        <mc:Fallback>
+        <mc:Fallback xmlns="">
           <p:sp>
             <p:nvSpPr>
               <p:cNvPr id="6" name="テキスト ボックス 5">
@@ -4344,8 +4338,8 @@
           </a:p>
         </p:txBody>
       </p:sp>
-      <mc:AlternateContent xmlns:mc="http://schemas.openxmlformats.org/markup-compatibility/2006" xmlns:a14="http://schemas.microsoft.com/office/drawing/2010/main">
-        <mc:Choice Requires="a14">
+      <mc:AlternateContent xmlns:mc="http://schemas.openxmlformats.org/markup-compatibility/2006">
+        <mc:Choice xmlns:a14="http://schemas.microsoft.com/office/drawing/2010/main" Requires="a14">
           <p:sp>
             <p:nvSpPr>
               <p:cNvPr id="6" name="テキスト ボックス 5">
@@ -4541,14 +4535,14 @@
               <a:p>
                 <a:r>
                   <a:rPr lang="ja-JP" altLang="en-US" sz="2400" dirty="0"/>
-                  <a:t>・角加速度を大きく回転させるには大きな回転モーメントが必要</a:t>
+                  <a:t>・高速に回転させるには大きな回転モーメントが必要</a:t>
                 </a:r>
                 <a:endParaRPr lang="en-US" altLang="ja-JP" sz="2400" dirty="0"/>
               </a:p>
             </p:txBody>
           </p:sp>
         </mc:Choice>
-        <mc:Fallback xmlns="">
+        <mc:Fallback>
           <p:sp>
             <p:nvSpPr>
               <p:cNvPr id="6" name="テキスト ボックス 5">
@@ -5383,8 +5377,8 @@
           </a:p>
         </p:txBody>
       </p:sp>
-      <mc:AlternateContent xmlns:mc="http://schemas.openxmlformats.org/markup-compatibility/2006" xmlns:a14="http://schemas.microsoft.com/office/drawing/2010/main">
-        <mc:Choice Requires="a14">
+      <mc:AlternateContent xmlns:mc="http://schemas.openxmlformats.org/markup-compatibility/2006">
+        <mc:Choice xmlns:a14="http://schemas.microsoft.com/office/drawing/2010/main" Requires="a14">
           <p:sp>
             <p:nvSpPr>
               <p:cNvPr id="6" name="テキスト ボックス 5">
@@ -5576,10 +5570,10 @@
                       <m:rPr>
                         <m:sty m:val="p"/>
                       </m:rPr>
-                      <a:rPr lang="el-GR" altLang="ja-JP" sz="2400" i="1" smtClean="0">
-                        <a:latin typeface="Cambria Math" panose="02040503050406030204" pitchFamily="18" charset="0"/>
-                      </a:rPr>
-                      <m:t>Ω</m:t>
+                      <a:rPr lang="en-US" altLang="ja-JP" sz="2400" i="1" dirty="0">
+                        <a:latin typeface="Cambria Math" panose="02040503050406030204" pitchFamily="18" charset="0"/>
+                      </a:rPr>
+                      <m:t>ω</m:t>
                     </m:r>
                   </m:oMath>
                 </a14:m>
@@ -5613,7 +5607,7 @@
             </p:txBody>
           </p:sp>
         </mc:Choice>
-        <mc:Fallback xmlns="">
+        <mc:Fallback>
           <p:sp>
             <p:nvSpPr>
               <p:cNvPr id="6" name="テキスト ボックス 5">
@@ -6271,8 +6265,8 @@
           </a:p>
         </p:txBody>
       </p:sp>
-      <mc:AlternateContent xmlns:mc="http://schemas.openxmlformats.org/markup-compatibility/2006">
-        <mc:Choice xmlns:a14="http://schemas.microsoft.com/office/drawing/2010/main" Requires="a14">
+      <mc:AlternateContent xmlns:mc="http://schemas.openxmlformats.org/markup-compatibility/2006" xmlns:a14="http://schemas.microsoft.com/office/drawing/2010/main">
+        <mc:Choice Requires="a14">
           <p:sp>
             <p:nvSpPr>
               <p:cNvPr id="6" name="テキスト ボックス 5">
@@ -7065,16 +7059,7 @@
                         </a:solidFill>
                         <a:latin typeface="Cambria Math" panose="02040503050406030204" pitchFamily="18" charset="0"/>
                       </a:rPr>
-                      <m:t>(0)2=(0</m:t>
-                    </m:r>
-                    <m:r>
-                      <a:rPr lang="en-US" altLang="ja-JP" sz="2400" b="0" i="1" smtClean="0">
-                        <a:solidFill>
-                          <a:schemeClr val="tx1"/>
-                        </a:solidFill>
-                        <a:latin typeface="Cambria Math" panose="02040503050406030204" pitchFamily="18" charset="0"/>
-                      </a:rPr>
-                      <m:t>.5)(−9.8)(0)+(</m:t>
+                      <m:t>(0)2=(0.5)(−9.8)(0)+(</m:t>
                     </m:r>
                     <m:f>
                       <m:fPr>
@@ -7594,7 +7579,7 @@
             </p:txBody>
           </p:sp>
         </mc:Choice>
-        <mc:Fallback>
+        <mc:Fallback xmlns="">
           <p:sp>
             <p:nvSpPr>
               <p:cNvPr id="6" name="テキスト ボックス 5">
@@ -7705,8 +7690,8 @@
           </a:p>
         </p:txBody>
       </p:sp>
-      <mc:AlternateContent xmlns:mc="http://schemas.openxmlformats.org/markup-compatibility/2006">
-        <mc:Choice xmlns:a14="http://schemas.microsoft.com/office/drawing/2010/main" Requires="a14">
+      <mc:AlternateContent xmlns:mc="http://schemas.openxmlformats.org/markup-compatibility/2006" xmlns:a14="http://schemas.microsoft.com/office/drawing/2010/main">
+        <mc:Choice Requires="a14">
           <p:sp>
             <p:nvSpPr>
               <p:cNvPr id="6" name="テキスト ボックス 5">
@@ -8296,7 +8281,7 @@
             </p:txBody>
           </p:sp>
         </mc:Choice>
-        <mc:Fallback>
+        <mc:Fallback xmlns="">
           <p:sp>
             <p:nvSpPr>
               <p:cNvPr id="6" name="テキスト ボックス 5">
